--- a/lessons/lesson-13/slides.pptx
+++ b/lessons/lesson-13/slides.pptx
@@ -2,31 +2,32 @@
 <file path=ppt/presentation.xml><?xml version="1.0" encoding="utf-8"?>
 <p:presentation xmlns:p="http://schemas.openxmlformats.org/presentationml/2006/main">
   <p:sldMasterIdLst>
-    <p:sldMasterId xmlns:r="http://schemas.openxmlformats.org/officeDocument/2006/relationships" id="2147483648" r:id="Rbe677b0ad5db4352"/>
+    <p:sldMasterId xmlns:r="http://schemas.openxmlformats.org/officeDocument/2006/relationships" id="2147483648" r:id="R9cb746b5385042ef"/>
   </p:sldMasterIdLst>
   <p:notesMasterIdLst>
-    <p:notesMasterId xmlns:r="http://schemas.openxmlformats.org/officeDocument/2006/relationships" r:id="Rc3a359a968a24039"/>
+    <p:notesMasterId xmlns:r="http://schemas.openxmlformats.org/officeDocument/2006/relationships" r:id="R3c865ce5d63c4953"/>
   </p:notesMasterIdLst>
   <p:sldIdLst>
-    <p:sldId xmlns:r="http://schemas.openxmlformats.org/officeDocument/2006/relationships" id="256" r:id="Rf29bf922df4b4923"/>
-    <p:sldId xmlns:r="http://schemas.openxmlformats.org/officeDocument/2006/relationships" id="257" r:id="R56e0cec97347451b"/>
-    <p:sldId xmlns:r="http://schemas.openxmlformats.org/officeDocument/2006/relationships" id="258" r:id="R4a9893815ce44206"/>
-    <p:sldId xmlns:r="http://schemas.openxmlformats.org/officeDocument/2006/relationships" id="259" r:id="R1613ac3c5d174369"/>
-    <p:sldId xmlns:r="http://schemas.openxmlformats.org/officeDocument/2006/relationships" id="260" r:id="Re46d0b4b6ff742a6"/>
-    <p:sldId xmlns:r="http://schemas.openxmlformats.org/officeDocument/2006/relationships" id="261" r:id="R02b538e92230493a"/>
-    <p:sldId xmlns:r="http://schemas.openxmlformats.org/officeDocument/2006/relationships" id="262" r:id="Rd621c7d58c234d31"/>
-    <p:sldId xmlns:r="http://schemas.openxmlformats.org/officeDocument/2006/relationships" id="263" r:id="R7646ab9998ef4203"/>
-    <p:sldId xmlns:r="http://schemas.openxmlformats.org/officeDocument/2006/relationships" id="264" r:id="R6a32214c0ba64889"/>
-    <p:sldId xmlns:r="http://schemas.openxmlformats.org/officeDocument/2006/relationships" id="265" r:id="R14b223e0a53b411f"/>
-    <p:sldId xmlns:r="http://schemas.openxmlformats.org/officeDocument/2006/relationships" id="266" r:id="R5637f372411f4e37"/>
-    <p:sldId xmlns:r="http://schemas.openxmlformats.org/officeDocument/2006/relationships" id="267" r:id="Ra953507045c2449a"/>
-    <p:sldId xmlns:r="http://schemas.openxmlformats.org/officeDocument/2006/relationships" id="268" r:id="Rf661a03a3e7942a7"/>
-    <p:sldId xmlns:r="http://schemas.openxmlformats.org/officeDocument/2006/relationships" id="269" r:id="Ra1d9f1319cfb4430"/>
-    <p:sldId xmlns:r="http://schemas.openxmlformats.org/officeDocument/2006/relationships" id="270" r:id="R8fc5e3ad3b274b77"/>
-    <p:sldId xmlns:r="http://schemas.openxmlformats.org/officeDocument/2006/relationships" id="271" r:id="R8480f923d85d440b"/>
-    <p:sldId xmlns:r="http://schemas.openxmlformats.org/officeDocument/2006/relationships" id="272" r:id="R2e0fc9ab4feb4c4a"/>
-    <p:sldId xmlns:r="http://schemas.openxmlformats.org/officeDocument/2006/relationships" id="273" r:id="R91dbd9d91af64d33"/>
-    <p:sldId xmlns:r="http://schemas.openxmlformats.org/officeDocument/2006/relationships" id="274" r:id="R7d68660c4e024afe"/>
+    <p:sldId xmlns:r="http://schemas.openxmlformats.org/officeDocument/2006/relationships" id="256" r:id="Rb95c83d032c24f69"/>
+    <p:sldId xmlns:r="http://schemas.openxmlformats.org/officeDocument/2006/relationships" id="257" r:id="R0049f090508a4e41"/>
+    <p:sldId xmlns:r="http://schemas.openxmlformats.org/officeDocument/2006/relationships" id="258" r:id="R5497a664b7d14dfc"/>
+    <p:sldId xmlns:r="http://schemas.openxmlformats.org/officeDocument/2006/relationships" id="259" r:id="Rf18c4b3a5e374415"/>
+    <p:sldId xmlns:r="http://schemas.openxmlformats.org/officeDocument/2006/relationships" id="260" r:id="R6f9296158efc4ed7"/>
+    <p:sldId xmlns:r="http://schemas.openxmlformats.org/officeDocument/2006/relationships" id="261" r:id="Rbcba23321f0745d1"/>
+    <p:sldId xmlns:r="http://schemas.openxmlformats.org/officeDocument/2006/relationships" id="262" r:id="Ra16cc6218f5f4e6f"/>
+    <p:sldId xmlns:r="http://schemas.openxmlformats.org/officeDocument/2006/relationships" id="263" r:id="R9b5663a61d814ca2"/>
+    <p:sldId xmlns:r="http://schemas.openxmlformats.org/officeDocument/2006/relationships" id="264" r:id="Rddc69a2a26744973"/>
+    <p:sldId xmlns:r="http://schemas.openxmlformats.org/officeDocument/2006/relationships" id="265" r:id="Rc3bb416d92f84679"/>
+    <p:sldId xmlns:r="http://schemas.openxmlformats.org/officeDocument/2006/relationships" id="266" r:id="R543cb6ca030d464e"/>
+    <p:sldId xmlns:r="http://schemas.openxmlformats.org/officeDocument/2006/relationships" id="267" r:id="R1b3270f57d0244ff"/>
+    <p:sldId xmlns:r="http://schemas.openxmlformats.org/officeDocument/2006/relationships" id="268" r:id="R94e1a7ffe3ba43ac"/>
+    <p:sldId xmlns:r="http://schemas.openxmlformats.org/officeDocument/2006/relationships" id="269" r:id="R326e94bce7144539"/>
+    <p:sldId xmlns:r="http://schemas.openxmlformats.org/officeDocument/2006/relationships" id="270" r:id="Rc2048a48e09a4c7f"/>
+    <p:sldId xmlns:r="http://schemas.openxmlformats.org/officeDocument/2006/relationships" id="271" r:id="R696c2e0c742748f5"/>
+    <p:sldId xmlns:r="http://schemas.openxmlformats.org/officeDocument/2006/relationships" id="272" r:id="R57f0325efecc4a41"/>
+    <p:sldId xmlns:r="http://schemas.openxmlformats.org/officeDocument/2006/relationships" id="273" r:id="Rc2de93b255a14bc2"/>
+    <p:sldId xmlns:r="http://schemas.openxmlformats.org/officeDocument/2006/relationships" id="274" r:id="R34b4035cff7e432f"/>
+    <p:sldId xmlns:r="http://schemas.openxmlformats.org/officeDocument/2006/relationships" id="275" r:id="Rbf29b5947dd54d3c"/>
   </p:sldIdLst>
   <p:sldSz cx="12192000" cy="6858000"/>
   <p:notesSz cx="6858000" cy="9144000"/>
@@ -406,7 +407,7 @@
           <a:lstStyle xmlns:a="http://schemas.openxmlformats.org/drawingml/2006/main"/>
           <a:p xmlns:a="http://schemas.openxmlformats.org/drawingml/2006/main">
             <a:r>
-              <a:t>开场放下第 12 课工作流原型。第 10–12 课解决了受限执行、自动化和个人工作流设计，本课检查原型是否经过评价，并完成第三次正式提交。</a:t>
+              <a:t>本讲聚焦“工作流评价、结果分析与失败复盘”。封面只保留正式课名，课堂问题从下一页展开。</a:t>
             </a:r>
           </a:p>
           <a:p xmlns:a="http://schemas.openxmlformats.org/drawingml/2006/main">
@@ -426,12 +427,7 @@
           </a:p>
           <a:p xmlns:a="http://schemas.openxmlformats.org/drawingml/2006/main">
             <a:r>
-              <a:t>- /Users/bright/Projects/courses/graduate/lessons/备课规划.md</a:t>
-            </a:r>
-          </a:p>
-          <a:p xmlns:a="http://schemas.openxmlformats.org/drawingml/2006/main">
-            <a:r>
-              <a:t>- /Users/bright/Projects/courses/graduate/lessons/lesson-13/handout.md</a:t>
+              <a:t>- /Users/bright/Projects/courses/graduate/lessons/lesson-13/slides.md</a:t>
             </a:r>
           </a:p>
           <a:p xmlns:a="http://schemas.openxmlformats.org/drawingml/2006/main">
@@ -1411,7 +1407,7 @@
           <a:lstStyle xmlns:a="http://schemas.openxmlformats.org/drawingml/2006/main"/>
           <a:p xmlns:a="http://schemas.openxmlformats.org/drawingml/2006/main">
             <a:r>
-              <a:t>回扣：未通过只修复缺失条件，不重复提交无关材料；失败选择性删除是必须修复的红线。第 14 课将把评价结果、证据充分性、威胁与失败审计写入论文式短文。</a:t>
+              <a:t>回收本讲核心概念及其关系。本页不新增任务；请学生用边界句检查自己的项目工件。</a:t>
             </a:r>
           </a:p>
           <a:p xmlns:a="http://schemas.openxmlformats.org/drawingml/2006/main">
@@ -1426,12 +1422,7 @@
           </a:p>
           <a:p xmlns:a="http://schemas.openxmlformats.org/drawingml/2006/main">
             <a:r>
-              <a:t>- /Users/bright/Projects/courses/graduate/course/assignments.md</a:t>
-            </a:r>
-          </a:p>
-          <a:p xmlns:a="http://schemas.openxmlformats.org/drawingml/2006/main">
-            <a:r>
-              <a:t>- /Users/bright/Projects/courses/graduate/lessons/备课规划.md</a:t>
+              <a:t>- /Users/bright/Projects/courses/graduate/course/syllabus.md</a:t>
             </a:r>
           </a:p>
           <a:p xmlns:a="http://schemas.openxmlformats.org/drawingml/2006/main">
@@ -1441,17 +1432,7 @@
           </a:p>
           <a:p xmlns:a="http://schemas.openxmlformats.org/drawingml/2006/main">
             <a:r>
-              <a:t>- Sculley, D. et al. Hidden Technical Debt in Machine Learning Systems. NeurIPS, 2015.</a:t>
-            </a:r>
-          </a:p>
-          <a:p xmlns:a="http://schemas.openxmlformats.org/drawingml/2006/main">
-            <a:r>
-              <a:t>- Bouthillier, X. et al. Accounting for Variance in Machine Learning Benchmarks. MLSys, 2021.</a:t>
-            </a:r>
-          </a:p>
-          <a:p xmlns:a="http://schemas.openxmlformats.org/drawingml/2006/main">
-            <a:r>
-              <a:t>- Breck, E. et al. The ML Test Score. IEEE Big Data, 2017.</a:t>
+              <a:t>- /Users/bright/Projects/courses/graduate/lessons/lesson-13/slides.md</a:t>
             </a:r>
           </a:p>
           <a:p xmlns:a="http://schemas.openxmlformats.org/drawingml/2006/main">
@@ -1557,6 +1538,121 @@
           <a:p xmlns:a="http://schemas.openxmlformats.org/drawingml/2006/main">
             <a:r>
               <a:t>- /Users/bright/Projects/courses/graduate/lessons/lesson-13/slides.md</a:t>
+            </a:r>
+          </a:p>
+          <a:p xmlns:a="http://schemas.openxmlformats.org/drawingml/2006/main">
+            <a:r>
+              <a:t>[/Sources]</a:t>
+            </a:r>
+          </a:p>
+        </p:txBody>
+      </p:sp>
+      <p:sp>
+        <p:nvSpPr>
+          <p:cNvPr id="4" name="Slide Number Placeholder 3"/>
+          <p:cNvSpPr>
+            <a:spLocks xmlns:a="http://schemas.openxmlformats.org/drawingml/2006/main" noGrp="1"/>
+          </p:cNvSpPr>
+          <p:nvPr>
+            <p:ph type="sldNum" idx="5"/>
+          </p:nvPr>
+        </p:nvSpPr>
+        <p:spPr/>
+        <p:txBody>
+          <a:bodyPr xmlns:a="http://schemas.openxmlformats.org/drawingml/2006/main"/>
+          <a:lstStyle xmlns:a="http://schemas.openxmlformats.org/drawingml/2006/main"/>
+          <a:p xmlns:a="http://schemas.openxmlformats.org/drawingml/2006/main"/>
+        </p:txBody>
+      </p:sp>
+    </p:spTree>
+  </p:cSld>
+  <p:clrMapOvr>
+    <a:masterClrMapping xmlns:a="http://schemas.openxmlformats.org/drawingml/2006/main"/>
+  </p:clrMapOvr>
+</p:notes>
+</file>
+
+<file path=ppt/notesSlides/notesSlide20.xml><?xml version="1.0" encoding="utf-8"?>
+<p:notes xmlns:p="http://schemas.openxmlformats.org/presentationml/2006/main">
+  <p:cSld>
+    <p:spTree>
+      <p:nvGrpSpPr>
+        <p:cNvPr id="1" name=""/>
+        <p:cNvGrpSpPr/>
+        <p:nvPr/>
+      </p:nvGrpSpPr>
+      <p:grpSpPr>
+        <a:xfrm xmlns:a="http://schemas.openxmlformats.org/drawingml/2006/main"/>
+      </p:grpSpPr>
+      <p:sp>
+        <p:nvSpPr>
+          <p:cNvPr id="2" name="Slide Image Placeholder 1"/>
+          <p:cNvSpPr>
+            <a:spLocks xmlns:a="http://schemas.openxmlformats.org/drawingml/2006/main" noGrp="1"/>
+          </p:cNvSpPr>
+          <p:nvPr>
+            <p:ph type="sldImg" idx="0"/>
+          </p:nvPr>
+        </p:nvSpPr>
+        <p:spPr/>
+      </p:sp>
+      <p:sp>
+        <p:nvSpPr>
+          <p:cNvPr id="3" name="Notes Placeholder 2"/>
+          <p:cNvSpPr>
+            <a:spLocks xmlns:a="http://schemas.openxmlformats.org/drawingml/2006/main" noGrp="1"/>
+          </p:cNvSpPr>
+          <p:nvPr>
+            <p:ph type="body" idx="1"/>
+          </p:nvPr>
+        </p:nvSpPr>
+        <p:spPr/>
+        <p:txBody>
+          <a:bodyPr xmlns:a="http://schemas.openxmlformats.org/drawingml/2006/main"/>
+          <a:lstStyle xmlns:a="http://schemas.openxmlformats.org/drawingml/2006/main"/>
+          <a:p xmlns:a="http://schemas.openxmlformats.org/drawingml/2006/main">
+            <a:r>
+              <a:t>回扣：未通过只修复缺失条件，不重复提交无关材料；失败选择性删除是必须修复的红线。第 14 课将把评价结果、证据充分性、威胁与失败审计写入论文式短文。</a:t>
+            </a:r>
+          </a:p>
+          <a:p xmlns:a="http://schemas.openxmlformats.org/drawingml/2006/main">
+            <a:r>
+              <a:t/>
+            </a:r>
+          </a:p>
+          <a:p xmlns:a="http://schemas.openxmlformats.org/drawingml/2006/main">
+            <a:r>
+              <a:t>[Sources]</a:t>
+            </a:r>
+          </a:p>
+          <a:p xmlns:a="http://schemas.openxmlformats.org/drawingml/2006/main">
+            <a:r>
+              <a:t>- /Users/bright/Projects/courses/graduate/course/assignments.md</a:t>
+            </a:r>
+          </a:p>
+          <a:p xmlns:a="http://schemas.openxmlformats.org/drawingml/2006/main">
+            <a:r>
+              <a:t>- /Users/bright/Projects/courses/graduate/lessons/备课规划.md</a:t>
+            </a:r>
+          </a:p>
+          <a:p xmlns:a="http://schemas.openxmlformats.org/drawingml/2006/main">
+            <a:r>
+              <a:t>- /Users/bright/Projects/courses/graduate/lessons/lesson-13/handout.md</a:t>
+            </a:r>
+          </a:p>
+          <a:p xmlns:a="http://schemas.openxmlformats.org/drawingml/2006/main">
+            <a:r>
+              <a:t>- Sculley, D. et al. Hidden Technical Debt in Machine Learning Systems. NeurIPS, 2015.</a:t>
+            </a:r>
+          </a:p>
+          <a:p xmlns:a="http://schemas.openxmlformats.org/drawingml/2006/main">
+            <a:r>
+              <a:t>- Bouthillier, X. et al. Accounting for Variance in Machine Learning Benchmarks. MLSys, 2021.</a:t>
+            </a:r>
+          </a:p>
+          <a:p xmlns:a="http://schemas.openxmlformats.org/drawingml/2006/main">
+            <a:r>
+              <a:t>- Breck, E. et al. The ML Test Score. IEEE Big Data, 2017.</a:t>
             </a:r>
           </a:p>
           <a:p xmlns:a="http://schemas.openxmlformats.org/drawingml/2006/main">
@@ -2297,7 +2393,7 @@
           <p:nvPr/>
         </p:nvPicPr>
         <p:blipFill>
-          <a:blip xmlns:r="http://schemas.openxmlformats.org/officeDocument/2006/relationships" xmlns:a="http://schemas.openxmlformats.org/drawingml/2006/main" r:embed="Refbdd9a82ae145ab">
+          <a:blip xmlns:r="http://schemas.openxmlformats.org/officeDocument/2006/relationships" xmlns:a="http://schemas.openxmlformats.org/drawingml/2006/main" r:embed="Rea54bdc5f9614261">
             <a:duotone>
               <a:prstClr val="black"/>
               <a:schemeClr val="accent1">
@@ -2475,7 +2571,7 @@
           <p:nvPr/>
         </p:nvPicPr>
         <p:blipFill rotWithShape="1">
-          <a:blip xmlns:r="http://schemas.openxmlformats.org/officeDocument/2006/relationships" xmlns:a="http://schemas.openxmlformats.org/drawingml/2006/main" r:embed="R31dd5c870d7f4671"/>
+          <a:blip xmlns:r="http://schemas.openxmlformats.org/officeDocument/2006/relationships" xmlns:a="http://schemas.openxmlformats.org/drawingml/2006/main" r:embed="Rce9262c6f10946bd"/>
           <a:srcRect xmlns:a="http://schemas.openxmlformats.org/drawingml/2006/main" l="74359" t="0" r="1346" b="0"/>
           <a:stretch xmlns:a="http://schemas.openxmlformats.org/drawingml/2006/main"/>
         </p:blipFill>
@@ -2498,7 +2594,7 @@
           <p:nvPr/>
         </p:nvPicPr>
         <p:blipFill rotWithShape="1">
-          <a:blip xmlns:r="http://schemas.openxmlformats.org/officeDocument/2006/relationships" xmlns:a="http://schemas.openxmlformats.org/drawingml/2006/main" r:embed="R0d0c645a120a4e7b">
+          <a:blip xmlns:r="http://schemas.openxmlformats.org/officeDocument/2006/relationships" xmlns:a="http://schemas.openxmlformats.org/drawingml/2006/main" r:embed="R1e8371f8399b400d">
             <a:alphaModFix amt="35000"/>
           </a:blip>
           <a:srcRect xmlns:a="http://schemas.openxmlformats.org/drawingml/2006/main" l="0" t="9831" r="0" b="36385"/>
@@ -2760,7 +2856,7 @@
           <p:nvPr/>
         </p:nvPicPr>
         <p:blipFill>
-          <a:blip xmlns:r="http://schemas.openxmlformats.org/officeDocument/2006/relationships" xmlns:a="http://schemas.openxmlformats.org/drawingml/2006/main" r:embed="Rad7bc01a86ab4c67"/>
+          <a:blip xmlns:r="http://schemas.openxmlformats.org/officeDocument/2006/relationships" xmlns:a="http://schemas.openxmlformats.org/drawingml/2006/main" r:embed="Rbe368d855631470c"/>
           <a:srcRect xmlns:a="http://schemas.openxmlformats.org/drawingml/2006/main" l="0" t="0" r="54251" b="0"/>
           <a:stretch xmlns:a="http://schemas.openxmlformats.org/drawingml/2006/main"/>
         </p:blipFill>
@@ -3017,7 +3113,7 @@
           <p:nvPr/>
         </p:nvPicPr>
         <p:blipFill rotWithShape="1">
-          <a:blip xmlns:r="http://schemas.openxmlformats.org/officeDocument/2006/relationships" xmlns:a="http://schemas.openxmlformats.org/drawingml/2006/main" r:embed="R32683d6bb6ca4a1c"/>
+          <a:blip xmlns:r="http://schemas.openxmlformats.org/officeDocument/2006/relationships" xmlns:a="http://schemas.openxmlformats.org/drawingml/2006/main" r:embed="Rcd8e760114a44951"/>
           <a:srcRect xmlns:a="http://schemas.openxmlformats.org/drawingml/2006/main" l="0" t="0" r="1346" b="0"/>
           <a:stretch xmlns:a="http://schemas.openxmlformats.org/drawingml/2006/main"/>
         </p:blipFill>
@@ -3200,7 +3296,7 @@
           <p:nvPr/>
         </p:nvPicPr>
         <p:blipFill>
-          <a:blip xmlns:r="http://schemas.openxmlformats.org/officeDocument/2006/relationships" xmlns:a="http://schemas.openxmlformats.org/drawingml/2006/main" r:embed="Rb36ab16730104d9a"/>
+          <a:blip xmlns:r="http://schemas.openxmlformats.org/officeDocument/2006/relationships" xmlns:a="http://schemas.openxmlformats.org/drawingml/2006/main" r:embed="R705592c19a6e49f1"/>
           <a:stretch xmlns:a="http://schemas.openxmlformats.org/drawingml/2006/main">
             <a:fillRect l="0" t="0" r="0" b="0"/>
           </a:stretch>
@@ -3296,7 +3392,7 @@
           <p:nvPr/>
         </p:nvPicPr>
         <p:blipFill>
-          <a:blip xmlns:r="http://schemas.openxmlformats.org/officeDocument/2006/relationships" xmlns:a="http://schemas.openxmlformats.org/drawingml/2006/main" r:embed="Rfbe0bab8cc2d4cc2">
+          <a:blip xmlns:r="http://schemas.openxmlformats.org/officeDocument/2006/relationships" xmlns:a="http://schemas.openxmlformats.org/drawingml/2006/main" r:embed="Ra41c5500ea314942">
             <a:duotone>
               <a:prstClr val="black"/>
               <a:schemeClr val="accent1">
@@ -3463,7 +3559,7 @@
           <p:nvPr/>
         </p:nvPicPr>
         <p:blipFill rotWithShape="1">
-          <a:blip xmlns:r="http://schemas.openxmlformats.org/officeDocument/2006/relationships" xmlns:a="http://schemas.openxmlformats.org/drawingml/2006/main" r:embed="R6503e1f95af34d77">
+          <a:blip xmlns:r="http://schemas.openxmlformats.org/officeDocument/2006/relationships" xmlns:a="http://schemas.openxmlformats.org/drawingml/2006/main" r:embed="R342dc97739ab4ba8">
             <a:alphaModFix amt="20000"/>
             <a:duotone>
               <a:schemeClr val="accent4">
@@ -3561,10 +3657,10 @@
   </p:cSld>
   <p:clrMap bg1="lt1" tx1="dk1" bg2="lt2" tx2="dk2" accent1="accent1" accent2="accent2" accent3="accent3" accent4="accent4" accent5="accent5" accent6="accent6" hlink="hlink" folHlink="folHlink"/>
   <p:sldLayoutIdLst>
-    <p:sldLayoutId xmlns:r="http://schemas.openxmlformats.org/officeDocument/2006/relationships" id="2147483649" r:id="R9e25f31a208a4d30"/>
-    <p:sldLayoutId xmlns:r="http://schemas.openxmlformats.org/officeDocument/2006/relationships" id="2147483650" r:id="Rd3bebce979ae42a6"/>
-    <p:sldLayoutId xmlns:r="http://schemas.openxmlformats.org/officeDocument/2006/relationships" id="2147483651" r:id="Ra6ea2c22b33f4415"/>
-    <p:sldLayoutId xmlns:r="http://schemas.openxmlformats.org/officeDocument/2006/relationships" id="2147483652" r:id="Rc054456658b3423e"/>
+    <p:sldLayoutId xmlns:r="http://schemas.openxmlformats.org/officeDocument/2006/relationships" id="2147483649" r:id="R0c14bdaf4b2a4c6f"/>
+    <p:sldLayoutId xmlns:r="http://schemas.openxmlformats.org/officeDocument/2006/relationships" id="2147483650" r:id="Rba2810b50f2149fa"/>
+    <p:sldLayoutId xmlns:r="http://schemas.openxmlformats.org/officeDocument/2006/relationships" id="2147483651" r:id="R03410caf468841e5"/>
+    <p:sldLayoutId xmlns:r="http://schemas.openxmlformats.org/officeDocument/2006/relationships" id="2147483652" r:id="R8430498f2f714de0"/>
   </p:sldLayoutIdLst>
   <p:hf hdr="0" ftr="0" dt="0"/>
   <p:txStyles>
@@ -4097,120 +4193,6 @@
       </p:grpSpPr>
       <p:sp>
         <p:nvSpPr>
-          <p:cNvPr id="3" name="内容占位符 2">
-            <a:extLst xmlns:a="http://schemas.openxmlformats.org/drawingml/2006/main">
-              <a:ext uri="{FF2B5EF4-FFF2-40B4-BE49-F238E27FC236}">
-                <a16:creationId xmlns:a16="http://schemas.microsoft.com/office/drawing/2014/main" id="{D1D30E0E-D2D5-4C08-A919-2A1C2D5A8D02}"/>
-              </a:ext>
-            </a:extLst>
-          </p:cNvPr>
-          <p:cNvSpPr>
-            <a:spLocks xmlns:a="http://schemas.openxmlformats.org/drawingml/2006/main" noGrp="1"/>
-          </p:cNvSpPr>
-          <p:nvPr>
-            <p:ph idx="10"/>
-          </p:nvPr>
-        </p:nvSpPr>
-        <p:spPr>
-          <a:xfrm xmlns:a="http://schemas.openxmlformats.org/drawingml/2006/main">
-            <a:off x="1238250" y="3048000"/>
-            <a:ext cx="9715500" cy="2343150"/>
-          </a:xfrm>
-        </p:spPr>
-        <p:txBody>
-          <a:bodyPr xmlns:a="http://schemas.openxmlformats.org/drawingml/2006/main" lIns="0" tIns="0" rIns="0" bIns="0" anchor="ctr"/>
-          <a:lstStyle xmlns:a="http://schemas.openxmlformats.org/drawingml/2006/main"/>
-          <a:p xmlns:a="http://schemas.openxmlformats.org/drawingml/2006/main">
-            <a:pPr algn="ctr">
-              <a:lnSpc>
-                <a:spcPct val="125000"/>
-              </a:lnSpc>
-              <a:buNone/>
-            </a:pPr>
-            <a:r>
-              <a:rPr sz="1800" b="1">
-                <a:solidFill>
-                  <a:srgbClr val="18354E"/>
-                </a:solidFill>
-                <a:latin typeface="Microsoft YaHei"/>
-                <a:ea typeface="Microsoft YaHei"/>
-                <a:cs typeface="Microsoft YaHei"/>
-              </a:rPr>
-              <a:t>从“我的工作流能跑”到“它是否真的改善了目标科研动作”</a:t>
-            </a:r>
-            <a:endParaRPr>
-              <a:latin typeface="+mn-ea"/>
-              <a:ea typeface="+mn-ea"/>
-              <a:cs typeface="+mn-ea"/>
-            </a:endParaRPr>
-          </a:p>
-          <a:p xmlns:a="http://schemas.openxmlformats.org/drawingml/2006/main">
-            <a:r>
-              <a:rPr>
-                <a:latin typeface="+mn-ea"/>
-                <a:ea typeface="+mn-ea"/>
-                <a:cs typeface="+mn-ea"/>
-              </a:rPr>
-              <a:t/>
-            </a:r>
-            <a:endParaRPr>
-              <a:latin typeface="+mn-ea"/>
-              <a:ea typeface="+mn-ea"/>
-              <a:cs typeface="+mn-ea"/>
-            </a:endParaRPr>
-          </a:p>
-          <a:p xmlns:a="http://schemas.openxmlformats.org/drawingml/2006/main">
-            <a:pPr algn="ctr">
-              <a:lnSpc>
-                <a:spcPct val="125000"/>
-              </a:lnSpc>
-              <a:buNone/>
-            </a:pPr>
-            <a:r>
-              <a:rPr sz="1800" b="1">
-                <a:solidFill>
-                  <a:srgbClr val="18354E"/>
-                </a:solidFill>
-                <a:latin typeface="Microsoft YaHei"/>
-                <a:ea typeface="Microsoft YaHei"/>
-                <a:cs typeface="Microsoft YaHei"/>
-              </a:rPr>
-              <a:t>评价 + 结果映射 + 失败审计 + 人工审核</a:t>
-            </a:r>
-            <a:endParaRPr>
-              <a:latin typeface="+mn-ea"/>
-              <a:ea typeface="+mn-ea"/>
-              <a:cs typeface="+mn-ea"/>
-            </a:endParaRPr>
-          </a:p>
-          <a:p xmlns:a="http://schemas.openxmlformats.org/drawingml/2006/main">
-            <a:pPr algn="ctr">
-              <a:lnSpc>
-                <a:spcPct val="125000"/>
-              </a:lnSpc>
-              <a:buNone/>
-            </a:pPr>
-            <a:r>
-              <a:rPr sz="1800" b="1">
-                <a:solidFill>
-                  <a:srgbClr val="18354E"/>
-                </a:solidFill>
-                <a:latin typeface="Microsoft YaHei"/>
-                <a:ea typeface="Microsoft YaHei"/>
-                <a:cs typeface="Microsoft YaHei"/>
-              </a:rPr>
-              <a:t>第十三讲｜阶段七：原型验证成案 + 评价 → 验证门</a:t>
-            </a:r>
-            <a:endParaRPr>
-              <a:latin typeface="+mn-ea"/>
-              <a:ea typeface="+mn-ea"/>
-              <a:cs typeface="+mn-ea"/>
-            </a:endParaRPr>
-          </a:p>
-        </p:txBody>
-      </p:sp>
-      <p:sp>
-        <p:nvSpPr>
           <p:cNvPr id="2" name="矩形 11">
             <a:extLst xmlns:a="http://schemas.openxmlformats.org/drawingml/2006/main">
               <a:ext uri="{FF2B5EF4-FFF2-40B4-BE49-F238E27FC236}">
@@ -4225,27 +4207,27 @@
         </p:nvSpPr>
         <p:spPr>
           <a:xfrm xmlns:a="http://schemas.openxmlformats.org/drawingml/2006/main">
-            <a:off x="1333500" y="1295400"/>
-            <a:ext cx="9525000" cy="1645920"/>
+            <a:off x="1143000" y="1790700"/>
+            <a:ext cx="9906000" cy="1524000"/>
           </a:xfrm>
           <a:prstGeom xmlns:a="http://schemas.openxmlformats.org/drawingml/2006/main" prst="rect">
             <a:avLst/>
           </a:prstGeom>
         </p:spPr>
         <p:txBody>
-          <a:bodyPr xmlns:a="http://schemas.openxmlformats.org/drawingml/2006/main" lIns="0" tIns="0" rIns="0" bIns="0" anchor="ctr">
+          <a:bodyPr xmlns:a="http://schemas.openxmlformats.org/drawingml/2006/main" lIns="76200" tIns="38100" rIns="76200" bIns="38100" anchor="ctr">
             <a:spAutoFit/>
           </a:bodyPr>
           <a:lstStyle xmlns:a="http://schemas.openxmlformats.org/drawingml/2006/main"/>
           <a:p xmlns:a="http://schemas.openxmlformats.org/drawingml/2006/main">
             <a:pPr algn="ctr">
               <a:lnSpc>
-                <a:spcPct val="150000"/>
+                <a:spcPct val="112000"/>
               </a:lnSpc>
               <a:buNone/>
             </a:pPr>
             <a:r>
-              <a:rPr sz="2925" b="1">
+              <a:rPr sz="3150" b="1">
                 <a:solidFill>
                   <a:srgbClr val="C8161E"/>
                 </a:solidFill>
@@ -4253,7 +4235,7 @@
                 <a:ea typeface="Microsoft YaHei"/>
                 <a:cs typeface="Microsoft YaHei"/>
               </a:rPr>
-              <a:t>工作流评价、结果分析、失败审计与验证门</a:t>
+              <a:t>第13讲 工作流评价、结果分析与失败复盘</a:t>
             </a:r>
             <a:endParaRPr sz="4000" b="1" kern="0" spc="20">
               <a:solidFill>
@@ -5578,6 +5560,7 @@
           <a:lstStyle xmlns:a="http://schemas.openxmlformats.org/drawingml/2006/main"/>
           <a:p xmlns:a="http://schemas.openxmlformats.org/drawingml/2006/main">
             <a:pPr algn="ctr">
+              <a:buNone/>
               <a:defRPr sz="1800" b="1">
                 <a:solidFill>
                   <a:srgbClr val="C8161E"/>
@@ -11481,6 +11464,7 @@
           <a:lstStyle xmlns:a="http://schemas.openxmlformats.org/drawingml/2006/main"/>
           <a:p xmlns:a="http://schemas.openxmlformats.org/drawingml/2006/main">
             <a:pPr algn="ctr">
+              <a:buNone/>
               <a:defRPr sz="1800" b="1">
                 <a:solidFill>
                   <a:srgbClr val="C8161E"/>
@@ -17088,10 +17072,13 @@
           </a:xfrm>
         </p:spPr>
         <p:txBody>
-          <a:bodyPr xmlns:a="http://schemas.openxmlformats.org/drawingml/2006/main" lIns="76200" tIns="0" rIns="76200" bIns="0" anchor="ctr"/>
+          <a:bodyPr xmlns:a="http://schemas.openxmlformats.org/drawingml/2006/main" lIns="76200" tIns="38100" rIns="76200" bIns="38100" anchor="ctr"/>
           <a:lstStyle xmlns:a="http://schemas.openxmlformats.org/drawingml/2006/main"/>
           <a:p xmlns:a="http://schemas.openxmlformats.org/drawingml/2006/main">
             <a:pPr algn="l">
+              <a:lnSpc>
+                <a:spcPct val="112000"/>
+              </a:lnSpc>
               <a:buNone/>
             </a:pPr>
             <a:r>
@@ -17103,7 +17090,7 @@
                 <a:ea typeface="Microsoft YaHei"/>
                 <a:cs typeface="Microsoft YaHei"/>
               </a:rPr>
-              <a:t>验证门材料将成为第 14 课结果段与讨论段的直接输入</a:t>
+              <a:t>本讲知识点总结</a:t>
             </a:r>
             <a:endParaRPr/>
           </a:p>
@@ -17139,80 +17126,26 @@
       </p:sp>
       <p:sp>
         <p:nvSpPr>
-          <p:cNvPr id="6" name="p16-exit-title">
-            <a:extLst xmlns:a="http://schemas.openxmlformats.org/drawingml/2006/main">
-              <a:ext uri="{FF2B5EF4-FFF2-40B4-BE49-F238E27FC236}">
-                <a16:creationId xmlns:a16="http://schemas.microsoft.com/office/drawing/2014/main" id="{E1B0F3B8-70CE-4889-AA60-AAD3005E7AB1}"/>
-              </a:ext>
-            </a:extLst>
-          </p:cNvPr>
-          <p:cNvSpPr>
-            <a:spLocks xmlns:a="http://schemas.openxmlformats.org/drawingml/2006/main" noGrp="1"/>
-          </p:cNvSpPr>
-          <p:nvPr/>
-        </p:nvSpPr>
-        <p:spPr>
-          <a:xfrm xmlns:a="http://schemas.openxmlformats.org/drawingml/2006/main">
-            <a:off x="704850" y="990600"/>
-            <a:ext cx="5429250" cy="457200"/>
-          </a:xfrm>
-          <a:prstGeom xmlns:a="http://schemas.openxmlformats.org/drawingml/2006/main" prst="rect">
-            <a:avLst/>
-          </a:prstGeom>
-          <a:noFill xmlns:a="http://schemas.openxmlformats.org/drawingml/2006/main"/>
-          <a:ln xmlns:a="http://schemas.openxmlformats.org/drawingml/2006/main" w="0">
-            <a:noFill/>
-            <a:prstDash val="solid"/>
-          </a:ln>
-        </p:spPr>
-        <p:txBody>
-          <a:bodyPr xmlns:a="http://schemas.openxmlformats.org/drawingml/2006/main" lIns="76200" tIns="38100" rIns="76200" bIns="38100" anchor="ctr"/>
-          <a:lstStyle xmlns:a="http://schemas.openxmlformats.org/drawingml/2006/main"/>
-          <a:p xmlns:a="http://schemas.openxmlformats.org/drawingml/2006/main">
-            <a:pPr algn="ctr">
-              <a:buNone/>
-              <a:defRPr sz="2025" b="1">
-                <a:solidFill>
-                  <a:srgbClr val="C8161E"/>
-                </a:solidFill>
-              </a:defRPr>
-            </a:pPr>
-            <a:r>
-              <a:rPr sz="2025" b="1">
-                <a:solidFill>
-                  <a:srgbClr val="C8161E"/>
-                </a:solidFill>
-                <a:latin typeface="Microsoft YaHei"/>
-                <a:ea typeface="Microsoft YaHei"/>
-                <a:cs typeface="Microsoft YaHei"/>
-              </a:rPr>
-              <a:t>退出卡</a:t>
-            </a:r>
-          </a:p>
-        </p:txBody>
-      </p:sp>
-      <p:sp>
-        <p:nvSpPr>
-          <p:cNvPr id="7" name="p16-n-0">
-            <a:extLst xmlns:a="http://schemas.openxmlformats.org/drawingml/2006/main">
-              <a:ext uri="{FF2B5EF4-FFF2-40B4-BE49-F238E27FC236}">
-                <a16:creationId xmlns:a16="http://schemas.microsoft.com/office/drawing/2014/main" id="{F52F852F-0FE8-480E-B802-08CC6EECB680}"/>
-              </a:ext>
-            </a:extLst>
-          </p:cNvPr>
-          <p:cNvSpPr>
-            <a:spLocks xmlns:a="http://schemas.openxmlformats.org/drawingml/2006/main" noGrp="1"/>
-          </p:cNvSpPr>
-          <p:nvPr/>
-        </p:nvSpPr>
-        <p:spPr>
-          <a:xfrm xmlns:a="http://schemas.openxmlformats.org/drawingml/2006/main">
-            <a:off x="723900" y="1581150"/>
-            <a:ext cx="419100" cy="400050"/>
+          <p:cNvPr id="6" name="summary-13-number-0">
+            <a:extLst xmlns:a="http://schemas.openxmlformats.org/drawingml/2006/main">
+              <a:ext uri="{FF2B5EF4-FFF2-40B4-BE49-F238E27FC236}">
+                <a16:creationId xmlns:a16="http://schemas.microsoft.com/office/drawing/2014/main" id="{B243E460-10BB-44C8-8152-E844044CF37A}"/>
+              </a:ext>
+            </a:extLst>
+          </p:cNvPr>
+          <p:cNvSpPr>
+            <a:spLocks xmlns:a="http://schemas.openxmlformats.org/drawingml/2006/main" noGrp="1"/>
+          </p:cNvSpPr>
+          <p:nvPr/>
+        </p:nvSpPr>
+        <p:spPr>
+          <a:xfrm xmlns:a="http://schemas.openxmlformats.org/drawingml/2006/main">
+            <a:off x="457200" y="1219200"/>
+            <a:ext cx="476250" cy="476250"/>
           </a:xfrm>
           <a:prstGeom xmlns:a="http://schemas.openxmlformats.org/drawingml/2006/main" prst="roundRect">
             <a:avLst>
-              <a:gd name="adj" fmla="val 19048"/>
+              <a:gd name="adj" fmla="val 16000"/>
             </a:avLst>
           </a:prstGeom>
           <a:solidFill xmlns:a="http://schemas.openxmlformats.org/drawingml/2006/main">
@@ -17228,15 +17161,18 @@
           <a:lstStyle xmlns:a="http://schemas.openxmlformats.org/drawingml/2006/main"/>
           <a:p xmlns:a="http://schemas.openxmlformats.org/drawingml/2006/main">
             <a:pPr algn="ctr">
-              <a:buNone/>
-              <a:defRPr sz="1275" b="1">
+              <a:lnSpc>
+                <a:spcPct val="112000"/>
+              </a:lnSpc>
+              <a:buNone/>
+              <a:defRPr sz="1500" b="1">
                 <a:solidFill>
                   <a:srgbClr val="FFFFFF"/>
                 </a:solidFill>
               </a:defRPr>
             </a:pPr>
             <a:r>
-              <a:rPr sz="1275" b="1">
+              <a:rPr sz="1500" b="1">
                 <a:solidFill>
                   <a:srgbClr val="FFFFFF"/>
                 </a:solidFill>
@@ -17251,106 +17187,177 @@
       </p:sp>
       <p:sp>
         <p:nvSpPr>
-          <p:cNvPr id="8" name="p16-q-0">
-            <a:extLst xmlns:a="http://schemas.openxmlformats.org/drawingml/2006/main">
-              <a:ext uri="{FF2B5EF4-FFF2-40B4-BE49-F238E27FC236}">
-                <a16:creationId xmlns:a16="http://schemas.microsoft.com/office/drawing/2014/main" id="{03E1C003-D697-4334-BCFC-00FBFD8A0D8C}"/>
-              </a:ext>
-            </a:extLst>
-          </p:cNvPr>
-          <p:cNvSpPr>
-            <a:spLocks xmlns:a="http://schemas.openxmlformats.org/drawingml/2006/main" noGrp="1"/>
-          </p:cNvSpPr>
-          <p:nvPr/>
-        </p:nvSpPr>
-        <p:spPr>
-          <a:xfrm xmlns:a="http://schemas.openxmlformats.org/drawingml/2006/main">
-            <a:off x="1238250" y="1581150"/>
-            <a:ext cx="5048250" cy="400050"/>
-          </a:xfrm>
-          <a:prstGeom xmlns:a="http://schemas.openxmlformats.org/drawingml/2006/main" prst="rect">
-            <a:avLst/>
-          </a:prstGeom>
-          <a:solidFill xmlns:a="http://schemas.openxmlformats.org/drawingml/2006/main">
-            <a:srgbClr val="F3F6F7"/>
-          </a:solidFill>
-          <a:ln xmlns:a="http://schemas.openxmlformats.org/drawingml/2006/main" w="0">
-            <a:noFill/>
-            <a:prstDash val="solid"/>
-          </a:ln>
-        </p:spPr>
-        <p:txBody>
-          <a:bodyPr xmlns:a="http://schemas.openxmlformats.org/drawingml/2006/main" lIns="76200" tIns="38100" rIns="76200" bIns="38100" anchor="ctr"/>
-          <a:lstStyle xmlns:a="http://schemas.openxmlformats.org/drawingml/2006/main"/>
-          <a:p xmlns:a="http://schemas.openxmlformats.org/drawingml/2006/main">
-            <a:pPr algn="l">
-              <a:buNone/>
-              <a:defRPr sz="1350" b="1">
-                <a:solidFill>
-                  <a:srgbClr val="263746"/>
-                </a:solidFill>
-              </a:defRPr>
-            </a:pPr>
-            <a:r>
-              <a:rPr sz="1350" b="1">
-                <a:solidFill>
-                  <a:srgbClr val="263746"/>
-                </a:solidFill>
-                <a:latin typeface="Microsoft YaHei"/>
-                <a:ea typeface="Microsoft YaHei"/>
-                <a:cs typeface="Microsoft YaHei"/>
-              </a:rPr>
-              <a:t>评价有 baseline/对照或等价依据吗？</a:t>
-            </a:r>
-          </a:p>
-        </p:txBody>
-      </p:sp>
-      <p:sp>
-        <p:nvSpPr>
-          <p:cNvPr id="9" name="p16-n-1">
-            <a:extLst xmlns:a="http://schemas.openxmlformats.org/drawingml/2006/main">
-              <a:ext uri="{FF2B5EF4-FFF2-40B4-BE49-F238E27FC236}">
-                <a16:creationId xmlns:a16="http://schemas.microsoft.com/office/drawing/2014/main" id="{D3D5E220-48CA-4F4A-B29D-AE78E188DCB5}"/>
-              </a:ext>
-            </a:extLst>
-          </p:cNvPr>
-          <p:cNvSpPr>
-            <a:spLocks xmlns:a="http://schemas.openxmlformats.org/drawingml/2006/main" noGrp="1"/>
-          </p:cNvSpPr>
-          <p:nvPr/>
-        </p:nvSpPr>
-        <p:spPr>
-          <a:xfrm xmlns:a="http://schemas.openxmlformats.org/drawingml/2006/main">
-            <a:off x="723900" y="2247900"/>
-            <a:ext cx="419100" cy="400050"/>
+          <p:cNvPr id="7" name="summary-13-heading-0">
+            <a:extLst xmlns:a="http://schemas.openxmlformats.org/drawingml/2006/main">
+              <a:ext uri="{FF2B5EF4-FFF2-40B4-BE49-F238E27FC236}">
+                <a16:creationId xmlns:a16="http://schemas.microsoft.com/office/drawing/2014/main" id="{C4FFF26E-DD4C-41E6-9E4D-2AD482A130D9}"/>
+              </a:ext>
+            </a:extLst>
+          </p:cNvPr>
+          <p:cNvSpPr>
+            <a:spLocks xmlns:a="http://schemas.openxmlformats.org/drawingml/2006/main" noGrp="1"/>
+          </p:cNvSpPr>
+          <p:nvPr/>
+        </p:nvSpPr>
+        <p:spPr>
+          <a:xfrm xmlns:a="http://schemas.openxmlformats.org/drawingml/2006/main">
+            <a:off x="1028700" y="1162050"/>
+            <a:ext cx="2152650" cy="590550"/>
           </a:xfrm>
           <a:prstGeom xmlns:a="http://schemas.openxmlformats.org/drawingml/2006/main" prst="roundRect">
             <a:avLst>
-              <a:gd name="adj" fmla="val 19048"/>
+              <a:gd name="adj" fmla="val 12903"/>
             </a:avLst>
           </a:prstGeom>
           <a:solidFill xmlns:a="http://schemas.openxmlformats.org/drawingml/2006/main">
-            <a:srgbClr val="18354E"/>
-          </a:solidFill>
-          <a:ln xmlns:a="http://schemas.openxmlformats.org/drawingml/2006/main" w="0">
-            <a:noFill/>
-            <a:prstDash val="solid"/>
-          </a:ln>
-        </p:spPr>
-        <p:txBody>
-          <a:bodyPr xmlns:a="http://schemas.openxmlformats.org/drawingml/2006/main" lIns="76200" tIns="38100" rIns="76200" bIns="38100" anchor="ctr"/>
-          <a:lstStyle xmlns:a="http://schemas.openxmlformats.org/drawingml/2006/main"/>
-          <a:p xmlns:a="http://schemas.openxmlformats.org/drawingml/2006/main">
-            <a:pPr algn="ctr">
-              <a:buNone/>
-              <a:defRPr sz="1275" b="1">
+            <a:srgbClr val="E8F0F6"/>
+          </a:solidFill>
+          <a:ln xmlns:a="http://schemas.openxmlformats.org/drawingml/2006/main" w="0">
+            <a:noFill/>
+            <a:prstDash val="solid"/>
+          </a:ln>
+        </p:spPr>
+        <p:txBody>
+          <a:bodyPr xmlns:a="http://schemas.openxmlformats.org/drawingml/2006/main" lIns="76200" tIns="38100" rIns="76200" bIns="38100" anchor="ctr"/>
+          <a:lstStyle xmlns:a="http://schemas.openxmlformats.org/drawingml/2006/main"/>
+          <a:p xmlns:a="http://schemas.openxmlformats.org/drawingml/2006/main">
+            <a:pPr algn="ctr">
+              <a:lnSpc>
+                <a:spcPct val="112000"/>
+              </a:lnSpc>
+              <a:buNone/>
+              <a:defRPr sz="1725" b="1">
+                <a:solidFill>
+                  <a:srgbClr val="18354E"/>
+                </a:solidFill>
+              </a:defRPr>
+            </a:pPr>
+            <a:r>
+              <a:rPr sz="1725" b="1">
+                <a:solidFill>
+                  <a:srgbClr val="18354E"/>
+                </a:solidFill>
+                <a:latin typeface="Microsoft YaHei"/>
+                <a:ea typeface="Microsoft YaHei"/>
+                <a:cs typeface="Microsoft YaHei"/>
+              </a:rPr>
+              <a:t>对照评价</a:t>
+            </a:r>
+          </a:p>
+        </p:txBody>
+      </p:sp>
+      <p:sp>
+        <p:nvSpPr>
+          <p:cNvPr id="8" name="summary-13-detail-0">
+            <a:extLst xmlns:a="http://schemas.openxmlformats.org/drawingml/2006/main">
+              <a:ext uri="{FF2B5EF4-FFF2-40B4-BE49-F238E27FC236}">
+                <a16:creationId xmlns:a16="http://schemas.microsoft.com/office/drawing/2014/main" id="{690C90A0-B6DC-4309-818D-11A2E69BCAD8}"/>
+              </a:ext>
+            </a:extLst>
+          </p:cNvPr>
+          <p:cNvSpPr>
+            <a:spLocks xmlns:a="http://schemas.openxmlformats.org/drawingml/2006/main" noGrp="1"/>
+          </p:cNvSpPr>
+          <p:nvPr/>
+        </p:nvSpPr>
+        <p:spPr>
+          <a:xfrm xmlns:a="http://schemas.openxmlformats.org/drawingml/2006/main">
+            <a:off x="457200" y="2095500"/>
+            <a:ext cx="2724150" cy="1676400"/>
+          </a:xfrm>
+          <a:prstGeom xmlns:a="http://schemas.openxmlformats.org/drawingml/2006/main" prst="roundRect">
+            <a:avLst>
+              <a:gd name="adj" fmla="val 4545"/>
+            </a:avLst>
+          </a:prstGeom>
+          <a:solidFill xmlns:a="http://schemas.openxmlformats.org/drawingml/2006/main">
+            <a:srgbClr val="FFFFFF"/>
+          </a:solidFill>
+          <a:ln xmlns:a="http://schemas.openxmlformats.org/drawingml/2006/main" w="9525">
+            <a:solidFill>
+              <a:srgbClr val="D6DDE2"/>
+            </a:solidFill>
+            <a:prstDash val="solid"/>
+          </a:ln>
+        </p:spPr>
+        <p:txBody>
+          <a:bodyPr xmlns:a="http://schemas.openxmlformats.org/drawingml/2006/main" lIns="76200" tIns="38100" rIns="76200" bIns="38100" anchor="ctr"/>
+          <a:lstStyle xmlns:a="http://schemas.openxmlformats.org/drawingml/2006/main"/>
+          <a:p xmlns:a="http://schemas.openxmlformats.org/drawingml/2006/main">
+            <a:pPr algn="ctr">
+              <a:lnSpc>
+                <a:spcPct val="116000"/>
+              </a:lnSpc>
+              <a:buNone/>
+              <a:defRPr sz="1500" b="1">
+                <a:solidFill>
+                  <a:srgbClr val="263746"/>
+                </a:solidFill>
+              </a:defRPr>
+            </a:pPr>
+            <a:r>
+              <a:rPr sz="1500" b="1">
+                <a:solidFill>
+                  <a:srgbClr val="263746"/>
+                </a:solidFill>
+                <a:latin typeface="Microsoft YaHei"/>
+                <a:ea typeface="Microsoft YaHei"/>
+                <a:cs typeface="Microsoft YaHei"/>
+              </a:rPr>
+              <a:t>用 baseline、固定输入与可重复协议判断实际改善</a:t>
+            </a:r>
+          </a:p>
+        </p:txBody>
+      </p:sp>
+      <p:sp>
+        <p:nvSpPr>
+          <p:cNvPr id="9" name="summary-13-number-1">
+            <a:extLst xmlns:a="http://schemas.openxmlformats.org/drawingml/2006/main">
+              <a:ext uri="{FF2B5EF4-FFF2-40B4-BE49-F238E27FC236}">
+                <a16:creationId xmlns:a16="http://schemas.microsoft.com/office/drawing/2014/main" id="{77739DE2-114E-4889-B41C-B4895F62B24C}"/>
+              </a:ext>
+            </a:extLst>
+          </p:cNvPr>
+          <p:cNvSpPr>
+            <a:spLocks xmlns:a="http://schemas.openxmlformats.org/drawingml/2006/main" noGrp="1"/>
+          </p:cNvSpPr>
+          <p:nvPr/>
+        </p:nvSpPr>
+        <p:spPr>
+          <a:xfrm xmlns:a="http://schemas.openxmlformats.org/drawingml/2006/main">
+            <a:off x="3371850" y="1219200"/>
+            <a:ext cx="476250" cy="476250"/>
+          </a:xfrm>
+          <a:prstGeom xmlns:a="http://schemas.openxmlformats.org/drawingml/2006/main" prst="roundRect">
+            <a:avLst>
+              <a:gd name="adj" fmla="val 16000"/>
+            </a:avLst>
+          </a:prstGeom>
+          <a:solidFill xmlns:a="http://schemas.openxmlformats.org/drawingml/2006/main">
+            <a:srgbClr val="28745A"/>
+          </a:solidFill>
+          <a:ln xmlns:a="http://schemas.openxmlformats.org/drawingml/2006/main" w="0">
+            <a:noFill/>
+            <a:prstDash val="solid"/>
+          </a:ln>
+        </p:spPr>
+        <p:txBody>
+          <a:bodyPr xmlns:a="http://schemas.openxmlformats.org/drawingml/2006/main" lIns="76200" tIns="38100" rIns="76200" bIns="38100" anchor="ctr"/>
+          <a:lstStyle xmlns:a="http://schemas.openxmlformats.org/drawingml/2006/main"/>
+          <a:p xmlns:a="http://schemas.openxmlformats.org/drawingml/2006/main">
+            <a:pPr algn="ctr">
+              <a:lnSpc>
+                <a:spcPct val="112000"/>
+              </a:lnSpc>
+              <a:buNone/>
+              <a:defRPr sz="1500" b="1">
                 <a:solidFill>
                   <a:srgbClr val="FFFFFF"/>
                 </a:solidFill>
               </a:defRPr>
             </a:pPr>
             <a:r>
-              <a:rPr sz="1275" b="1">
+              <a:rPr sz="1500" b="1">
                 <a:solidFill>
                   <a:srgbClr val="FFFFFF"/>
                 </a:solidFill>
@@ -17365,106 +17372,177 @@
       </p:sp>
       <p:sp>
         <p:nvSpPr>
-          <p:cNvPr id="10" name="p16-q-1">
-            <a:extLst xmlns:a="http://schemas.openxmlformats.org/drawingml/2006/main">
-              <a:ext uri="{FF2B5EF4-FFF2-40B4-BE49-F238E27FC236}">
-                <a16:creationId xmlns:a16="http://schemas.microsoft.com/office/drawing/2014/main" id="{DF2C9FE0-2AAB-4D56-B656-4631AB3C0F30}"/>
-              </a:ext>
-            </a:extLst>
-          </p:cNvPr>
-          <p:cNvSpPr>
-            <a:spLocks xmlns:a="http://schemas.openxmlformats.org/drawingml/2006/main" noGrp="1"/>
-          </p:cNvSpPr>
-          <p:nvPr/>
-        </p:nvSpPr>
-        <p:spPr>
-          <a:xfrm xmlns:a="http://schemas.openxmlformats.org/drawingml/2006/main">
-            <a:off x="1238250" y="2247900"/>
-            <a:ext cx="5048250" cy="400050"/>
-          </a:xfrm>
-          <a:prstGeom xmlns:a="http://schemas.openxmlformats.org/drawingml/2006/main" prst="rect">
-            <a:avLst/>
-          </a:prstGeom>
-          <a:solidFill xmlns:a="http://schemas.openxmlformats.org/drawingml/2006/main">
-            <a:srgbClr val="F3F6F7"/>
-          </a:solidFill>
-          <a:ln xmlns:a="http://schemas.openxmlformats.org/drawingml/2006/main" w="0">
-            <a:noFill/>
-            <a:prstDash val="solid"/>
-          </a:ln>
-        </p:spPr>
-        <p:txBody>
-          <a:bodyPr xmlns:a="http://schemas.openxmlformats.org/drawingml/2006/main" lIns="76200" tIns="38100" rIns="76200" bIns="38100" anchor="ctr"/>
-          <a:lstStyle xmlns:a="http://schemas.openxmlformats.org/drawingml/2006/main"/>
-          <a:p xmlns:a="http://schemas.openxmlformats.org/drawingml/2006/main">
-            <a:pPr algn="l">
-              <a:buNone/>
-              <a:defRPr sz="1350" b="1">
-                <a:solidFill>
-                  <a:srgbClr val="263746"/>
-                </a:solidFill>
-              </a:defRPr>
-            </a:pPr>
-            <a:r>
-              <a:rPr sz="1350" b="1">
-                <a:solidFill>
-                  <a:srgbClr val="263746"/>
-                </a:solidFill>
-                <a:latin typeface="Microsoft YaHei"/>
-                <a:ea typeface="Microsoft YaHei"/>
-                <a:cs typeface="Microsoft YaHei"/>
-              </a:rPr>
-              <a:t>结果映射回 H1 还是只报告数字？</a:t>
-            </a:r>
-          </a:p>
-        </p:txBody>
-      </p:sp>
-      <p:sp>
-        <p:nvSpPr>
-          <p:cNvPr id="11" name="p16-n-2">
-            <a:extLst xmlns:a="http://schemas.openxmlformats.org/drawingml/2006/main">
-              <a:ext uri="{FF2B5EF4-FFF2-40B4-BE49-F238E27FC236}">
-                <a16:creationId xmlns:a16="http://schemas.microsoft.com/office/drawing/2014/main" id="{1F933B00-50A2-49A6-9621-B48634E4E405}"/>
-              </a:ext>
-            </a:extLst>
-          </p:cNvPr>
-          <p:cNvSpPr>
-            <a:spLocks xmlns:a="http://schemas.openxmlformats.org/drawingml/2006/main" noGrp="1"/>
-          </p:cNvSpPr>
-          <p:nvPr/>
-        </p:nvSpPr>
-        <p:spPr>
-          <a:xfrm xmlns:a="http://schemas.openxmlformats.org/drawingml/2006/main">
-            <a:off x="723900" y="2914650"/>
-            <a:ext cx="419100" cy="400050"/>
+          <p:cNvPr id="10" name="summary-13-heading-1">
+            <a:extLst xmlns:a="http://schemas.openxmlformats.org/drawingml/2006/main">
+              <a:ext uri="{FF2B5EF4-FFF2-40B4-BE49-F238E27FC236}">
+                <a16:creationId xmlns:a16="http://schemas.microsoft.com/office/drawing/2014/main" id="{3ED8CD88-84D6-435E-9D00-EEC1B00C4ED3}"/>
+              </a:ext>
+            </a:extLst>
+          </p:cNvPr>
+          <p:cNvSpPr>
+            <a:spLocks xmlns:a="http://schemas.openxmlformats.org/drawingml/2006/main" noGrp="1"/>
+          </p:cNvSpPr>
+          <p:nvPr/>
+        </p:nvSpPr>
+        <p:spPr>
+          <a:xfrm xmlns:a="http://schemas.openxmlformats.org/drawingml/2006/main">
+            <a:off x="3943350" y="1162050"/>
+            <a:ext cx="2152650" cy="590550"/>
           </a:xfrm>
           <a:prstGeom xmlns:a="http://schemas.openxmlformats.org/drawingml/2006/main" prst="roundRect">
             <a:avLst>
-              <a:gd name="adj" fmla="val 19048"/>
+              <a:gd name="adj" fmla="val 12903"/>
             </a:avLst>
           </a:prstGeom>
           <a:solidFill xmlns:a="http://schemas.openxmlformats.org/drawingml/2006/main">
-            <a:srgbClr val="18354E"/>
-          </a:solidFill>
-          <a:ln xmlns:a="http://schemas.openxmlformats.org/drawingml/2006/main" w="0">
-            <a:noFill/>
-            <a:prstDash val="solid"/>
-          </a:ln>
-        </p:spPr>
-        <p:txBody>
-          <a:bodyPr xmlns:a="http://schemas.openxmlformats.org/drawingml/2006/main" lIns="76200" tIns="38100" rIns="76200" bIns="38100" anchor="ctr"/>
-          <a:lstStyle xmlns:a="http://schemas.openxmlformats.org/drawingml/2006/main"/>
-          <a:p xmlns:a="http://schemas.openxmlformats.org/drawingml/2006/main">
-            <a:pPr algn="ctr">
-              <a:buNone/>
-              <a:defRPr sz="1275" b="1">
+            <a:srgbClr val="E7F2ED"/>
+          </a:solidFill>
+          <a:ln xmlns:a="http://schemas.openxmlformats.org/drawingml/2006/main" w="0">
+            <a:noFill/>
+            <a:prstDash val="solid"/>
+          </a:ln>
+        </p:spPr>
+        <p:txBody>
+          <a:bodyPr xmlns:a="http://schemas.openxmlformats.org/drawingml/2006/main" lIns="76200" tIns="38100" rIns="76200" bIns="38100" anchor="ctr"/>
+          <a:lstStyle xmlns:a="http://schemas.openxmlformats.org/drawingml/2006/main"/>
+          <a:p xmlns:a="http://schemas.openxmlformats.org/drawingml/2006/main">
+            <a:pPr algn="ctr">
+              <a:lnSpc>
+                <a:spcPct val="112000"/>
+              </a:lnSpc>
+              <a:buNone/>
+              <a:defRPr sz="1725" b="1">
+                <a:solidFill>
+                  <a:srgbClr val="28745A"/>
+                </a:solidFill>
+              </a:defRPr>
+            </a:pPr>
+            <a:r>
+              <a:rPr sz="1725" b="1">
+                <a:solidFill>
+                  <a:srgbClr val="28745A"/>
+                </a:solidFill>
+                <a:latin typeface="Microsoft YaHei"/>
+                <a:ea typeface="Microsoft YaHei"/>
+                <a:cs typeface="Microsoft YaHei"/>
+              </a:rPr>
+              <a:t>结果映射</a:t>
+            </a:r>
+          </a:p>
+        </p:txBody>
+      </p:sp>
+      <p:sp>
+        <p:nvSpPr>
+          <p:cNvPr id="11" name="summary-13-detail-1">
+            <a:extLst xmlns:a="http://schemas.openxmlformats.org/drawingml/2006/main">
+              <a:ext uri="{FF2B5EF4-FFF2-40B4-BE49-F238E27FC236}">
+                <a16:creationId xmlns:a16="http://schemas.microsoft.com/office/drawing/2014/main" id="{885E8B19-8B6A-449E-B53E-352FD4FE1F5A}"/>
+              </a:ext>
+            </a:extLst>
+          </p:cNvPr>
+          <p:cNvSpPr>
+            <a:spLocks xmlns:a="http://schemas.openxmlformats.org/drawingml/2006/main" noGrp="1"/>
+          </p:cNvSpPr>
+          <p:nvPr/>
+        </p:nvSpPr>
+        <p:spPr>
+          <a:xfrm xmlns:a="http://schemas.openxmlformats.org/drawingml/2006/main">
+            <a:off x="3371850" y="2095500"/>
+            <a:ext cx="2724150" cy="1676400"/>
+          </a:xfrm>
+          <a:prstGeom xmlns:a="http://schemas.openxmlformats.org/drawingml/2006/main" prst="roundRect">
+            <a:avLst>
+              <a:gd name="adj" fmla="val 4545"/>
+            </a:avLst>
+          </a:prstGeom>
+          <a:solidFill xmlns:a="http://schemas.openxmlformats.org/drawingml/2006/main">
+            <a:srgbClr val="FFFFFF"/>
+          </a:solidFill>
+          <a:ln xmlns:a="http://schemas.openxmlformats.org/drawingml/2006/main" w="9525">
+            <a:solidFill>
+              <a:srgbClr val="D6DDE2"/>
+            </a:solidFill>
+            <a:prstDash val="solid"/>
+          </a:ln>
+        </p:spPr>
+        <p:txBody>
+          <a:bodyPr xmlns:a="http://schemas.openxmlformats.org/drawingml/2006/main" lIns="76200" tIns="38100" rIns="76200" bIns="38100" anchor="ctr"/>
+          <a:lstStyle xmlns:a="http://schemas.openxmlformats.org/drawingml/2006/main"/>
+          <a:p xmlns:a="http://schemas.openxmlformats.org/drawingml/2006/main">
+            <a:pPr algn="ctr">
+              <a:lnSpc>
+                <a:spcPct val="116000"/>
+              </a:lnSpc>
+              <a:buNone/>
+              <a:defRPr sz="1500" b="1">
+                <a:solidFill>
+                  <a:srgbClr val="263746"/>
+                </a:solidFill>
+              </a:defRPr>
+            </a:pPr>
+            <a:r>
+              <a:rPr sz="1500" b="1">
+                <a:solidFill>
+                  <a:srgbClr val="263746"/>
+                </a:solidFill>
+                <a:latin typeface="Microsoft YaHei"/>
+                <a:ea typeface="Microsoft YaHei"/>
+                <a:cs typeface="Microsoft YaHei"/>
+              </a:rPr>
+              <a:t>正向与负向结果都要回到假设和研究判断</a:t>
+            </a:r>
+          </a:p>
+        </p:txBody>
+      </p:sp>
+      <p:sp>
+        <p:nvSpPr>
+          <p:cNvPr id="12" name="summary-13-number-2">
+            <a:extLst xmlns:a="http://schemas.openxmlformats.org/drawingml/2006/main">
+              <a:ext uri="{FF2B5EF4-FFF2-40B4-BE49-F238E27FC236}">
+                <a16:creationId xmlns:a16="http://schemas.microsoft.com/office/drawing/2014/main" id="{B138C0B7-81D6-423D-AC0E-3FD678E262C0}"/>
+              </a:ext>
+            </a:extLst>
+          </p:cNvPr>
+          <p:cNvSpPr>
+            <a:spLocks xmlns:a="http://schemas.openxmlformats.org/drawingml/2006/main" noGrp="1"/>
+          </p:cNvSpPr>
+          <p:nvPr/>
+        </p:nvSpPr>
+        <p:spPr>
+          <a:xfrm xmlns:a="http://schemas.openxmlformats.org/drawingml/2006/main">
+            <a:off x="6286500" y="1219200"/>
+            <a:ext cx="476250" cy="476250"/>
+          </a:xfrm>
+          <a:prstGeom xmlns:a="http://schemas.openxmlformats.org/drawingml/2006/main" prst="roundRect">
+            <a:avLst>
+              <a:gd name="adj" fmla="val 16000"/>
+            </a:avLst>
+          </a:prstGeom>
+          <a:solidFill xmlns:a="http://schemas.openxmlformats.org/drawingml/2006/main">
+            <a:srgbClr val="C8161E"/>
+          </a:solidFill>
+          <a:ln xmlns:a="http://schemas.openxmlformats.org/drawingml/2006/main" w="0">
+            <a:noFill/>
+            <a:prstDash val="solid"/>
+          </a:ln>
+        </p:spPr>
+        <p:txBody>
+          <a:bodyPr xmlns:a="http://schemas.openxmlformats.org/drawingml/2006/main" lIns="76200" tIns="38100" rIns="76200" bIns="38100" anchor="ctr"/>
+          <a:lstStyle xmlns:a="http://schemas.openxmlformats.org/drawingml/2006/main"/>
+          <a:p xmlns:a="http://schemas.openxmlformats.org/drawingml/2006/main">
+            <a:pPr algn="ctr">
+              <a:lnSpc>
+                <a:spcPct val="112000"/>
+              </a:lnSpc>
+              <a:buNone/>
+              <a:defRPr sz="1500" b="1">
                 <a:solidFill>
                   <a:srgbClr val="FFFFFF"/>
                 </a:solidFill>
               </a:defRPr>
             </a:pPr>
             <a:r>
-              <a:rPr sz="1275" b="1">
+              <a:rPr sz="1500" b="1">
                 <a:solidFill>
                   <a:srgbClr val="FFFFFF"/>
                 </a:solidFill>
@@ -17479,106 +17557,177 @@
       </p:sp>
       <p:sp>
         <p:nvSpPr>
-          <p:cNvPr id="12" name="p16-q-2">
-            <a:extLst xmlns:a="http://schemas.openxmlformats.org/drawingml/2006/main">
-              <a:ext uri="{FF2B5EF4-FFF2-40B4-BE49-F238E27FC236}">
-                <a16:creationId xmlns:a16="http://schemas.microsoft.com/office/drawing/2014/main" id="{93694E98-4837-4B7E-9E68-B9CF5D0AE388}"/>
-              </a:ext>
-            </a:extLst>
-          </p:cNvPr>
-          <p:cNvSpPr>
-            <a:spLocks xmlns:a="http://schemas.openxmlformats.org/drawingml/2006/main" noGrp="1"/>
-          </p:cNvSpPr>
-          <p:nvPr/>
-        </p:nvSpPr>
-        <p:spPr>
-          <a:xfrm xmlns:a="http://schemas.openxmlformats.org/drawingml/2006/main">
-            <a:off x="1238250" y="2914650"/>
-            <a:ext cx="5048250" cy="400050"/>
-          </a:xfrm>
-          <a:prstGeom xmlns:a="http://schemas.openxmlformats.org/drawingml/2006/main" prst="rect">
-            <a:avLst/>
-          </a:prstGeom>
-          <a:solidFill xmlns:a="http://schemas.openxmlformats.org/drawingml/2006/main">
-            <a:srgbClr val="F3F6F7"/>
-          </a:solidFill>
-          <a:ln xmlns:a="http://schemas.openxmlformats.org/drawingml/2006/main" w="0">
-            <a:noFill/>
-            <a:prstDash val="solid"/>
-          </a:ln>
-        </p:spPr>
-        <p:txBody>
-          <a:bodyPr xmlns:a="http://schemas.openxmlformats.org/drawingml/2006/main" lIns="76200" tIns="38100" rIns="76200" bIns="38100" anchor="ctr"/>
-          <a:lstStyle xmlns:a="http://schemas.openxmlformats.org/drawingml/2006/main"/>
-          <a:p xmlns:a="http://schemas.openxmlformats.org/drawingml/2006/main">
-            <a:pPr algn="l">
-              <a:buNone/>
-              <a:defRPr sz="1350" b="1">
-                <a:solidFill>
-                  <a:srgbClr val="263746"/>
-                </a:solidFill>
-              </a:defRPr>
-            </a:pPr>
-            <a:r>
-              <a:rPr sz="1350" b="1">
-                <a:solidFill>
-                  <a:srgbClr val="263746"/>
-                </a:solidFill>
-                <a:latin typeface="Microsoft YaHei"/>
-                <a:ea typeface="Microsoft YaHei"/>
-                <a:cs typeface="Microsoft YaHei"/>
-              </a:rPr>
-              <a:t>失败被保留并分类了吗？</a:t>
-            </a:r>
-          </a:p>
-        </p:txBody>
-      </p:sp>
-      <p:sp>
-        <p:nvSpPr>
-          <p:cNvPr id="13" name="p16-n-3">
-            <a:extLst xmlns:a="http://schemas.openxmlformats.org/drawingml/2006/main">
-              <a:ext uri="{FF2B5EF4-FFF2-40B4-BE49-F238E27FC236}">
-                <a16:creationId xmlns:a16="http://schemas.microsoft.com/office/drawing/2014/main" id="{74A6FE59-FCF3-4D28-8A0E-C186DFF46DAC}"/>
-              </a:ext>
-            </a:extLst>
-          </p:cNvPr>
-          <p:cNvSpPr>
-            <a:spLocks xmlns:a="http://schemas.openxmlformats.org/drawingml/2006/main" noGrp="1"/>
-          </p:cNvSpPr>
-          <p:nvPr/>
-        </p:nvSpPr>
-        <p:spPr>
-          <a:xfrm xmlns:a="http://schemas.openxmlformats.org/drawingml/2006/main">
-            <a:off x="723900" y="3581400"/>
-            <a:ext cx="419100" cy="400050"/>
+          <p:cNvPr id="13" name="summary-13-heading-2">
+            <a:extLst xmlns:a="http://schemas.openxmlformats.org/drawingml/2006/main">
+              <a:ext uri="{FF2B5EF4-FFF2-40B4-BE49-F238E27FC236}">
+                <a16:creationId xmlns:a16="http://schemas.microsoft.com/office/drawing/2014/main" id="{64C98D0E-9C1A-46A5-8806-AA411C22AC5D}"/>
+              </a:ext>
+            </a:extLst>
+          </p:cNvPr>
+          <p:cNvSpPr>
+            <a:spLocks xmlns:a="http://schemas.openxmlformats.org/drawingml/2006/main" noGrp="1"/>
+          </p:cNvSpPr>
+          <p:nvPr/>
+        </p:nvSpPr>
+        <p:spPr>
+          <a:xfrm xmlns:a="http://schemas.openxmlformats.org/drawingml/2006/main">
+            <a:off x="6858000" y="1162050"/>
+            <a:ext cx="2152650" cy="590550"/>
           </a:xfrm>
           <a:prstGeom xmlns:a="http://schemas.openxmlformats.org/drawingml/2006/main" prst="roundRect">
             <a:avLst>
-              <a:gd name="adj" fmla="val 19048"/>
+              <a:gd name="adj" fmla="val 12903"/>
             </a:avLst>
           </a:prstGeom>
           <a:solidFill xmlns:a="http://schemas.openxmlformats.org/drawingml/2006/main">
-            <a:srgbClr val="C8161E"/>
-          </a:solidFill>
-          <a:ln xmlns:a="http://schemas.openxmlformats.org/drawingml/2006/main" w="0">
-            <a:noFill/>
-            <a:prstDash val="solid"/>
-          </a:ln>
-        </p:spPr>
-        <p:txBody>
-          <a:bodyPr xmlns:a="http://schemas.openxmlformats.org/drawingml/2006/main" lIns="76200" tIns="38100" rIns="76200" bIns="38100" anchor="ctr"/>
-          <a:lstStyle xmlns:a="http://schemas.openxmlformats.org/drawingml/2006/main"/>
-          <a:p xmlns:a="http://schemas.openxmlformats.org/drawingml/2006/main">
-            <a:pPr algn="ctr">
-              <a:buNone/>
-              <a:defRPr sz="1275" b="1">
+            <a:srgbClr val="F8E9EA"/>
+          </a:solidFill>
+          <a:ln xmlns:a="http://schemas.openxmlformats.org/drawingml/2006/main" w="0">
+            <a:noFill/>
+            <a:prstDash val="solid"/>
+          </a:ln>
+        </p:spPr>
+        <p:txBody>
+          <a:bodyPr xmlns:a="http://schemas.openxmlformats.org/drawingml/2006/main" lIns="76200" tIns="38100" rIns="76200" bIns="38100" anchor="ctr"/>
+          <a:lstStyle xmlns:a="http://schemas.openxmlformats.org/drawingml/2006/main"/>
+          <a:p xmlns:a="http://schemas.openxmlformats.org/drawingml/2006/main">
+            <a:pPr algn="ctr">
+              <a:lnSpc>
+                <a:spcPct val="112000"/>
+              </a:lnSpc>
+              <a:buNone/>
+              <a:defRPr sz="1725" b="1">
+                <a:solidFill>
+                  <a:srgbClr val="C8161E"/>
+                </a:solidFill>
+              </a:defRPr>
+            </a:pPr>
+            <a:r>
+              <a:rPr sz="1725" b="1">
+                <a:solidFill>
+                  <a:srgbClr val="C8161E"/>
+                </a:solidFill>
+                <a:latin typeface="Microsoft YaHei"/>
+                <a:ea typeface="Microsoft YaHei"/>
+                <a:cs typeface="Microsoft YaHei"/>
+              </a:rPr>
+              <a:t>失败复盘</a:t>
+            </a:r>
+          </a:p>
+        </p:txBody>
+      </p:sp>
+      <p:sp>
+        <p:nvSpPr>
+          <p:cNvPr id="14" name="summary-13-detail-2">
+            <a:extLst xmlns:a="http://schemas.openxmlformats.org/drawingml/2006/main">
+              <a:ext uri="{FF2B5EF4-FFF2-40B4-BE49-F238E27FC236}">
+                <a16:creationId xmlns:a16="http://schemas.microsoft.com/office/drawing/2014/main" id="{6B319B54-F852-4BE5-B94A-1FCFD8056A19}"/>
+              </a:ext>
+            </a:extLst>
+          </p:cNvPr>
+          <p:cNvSpPr>
+            <a:spLocks xmlns:a="http://schemas.openxmlformats.org/drawingml/2006/main" noGrp="1"/>
+          </p:cNvSpPr>
+          <p:nvPr/>
+        </p:nvSpPr>
+        <p:spPr>
+          <a:xfrm xmlns:a="http://schemas.openxmlformats.org/drawingml/2006/main">
+            <a:off x="6286500" y="2095500"/>
+            <a:ext cx="2724150" cy="1676400"/>
+          </a:xfrm>
+          <a:prstGeom xmlns:a="http://schemas.openxmlformats.org/drawingml/2006/main" prst="roundRect">
+            <a:avLst>
+              <a:gd name="adj" fmla="val 4545"/>
+            </a:avLst>
+          </a:prstGeom>
+          <a:solidFill xmlns:a="http://schemas.openxmlformats.org/drawingml/2006/main">
+            <a:srgbClr val="FFFFFF"/>
+          </a:solidFill>
+          <a:ln xmlns:a="http://schemas.openxmlformats.org/drawingml/2006/main" w="9525">
+            <a:solidFill>
+              <a:srgbClr val="D6DDE2"/>
+            </a:solidFill>
+            <a:prstDash val="solid"/>
+          </a:ln>
+        </p:spPr>
+        <p:txBody>
+          <a:bodyPr xmlns:a="http://schemas.openxmlformats.org/drawingml/2006/main" lIns="76200" tIns="38100" rIns="76200" bIns="38100" anchor="ctr"/>
+          <a:lstStyle xmlns:a="http://schemas.openxmlformats.org/drawingml/2006/main"/>
+          <a:p xmlns:a="http://schemas.openxmlformats.org/drawingml/2006/main">
+            <a:pPr algn="ctr">
+              <a:lnSpc>
+                <a:spcPct val="116000"/>
+              </a:lnSpc>
+              <a:buNone/>
+              <a:defRPr sz="1500" b="1">
+                <a:solidFill>
+                  <a:srgbClr val="263746"/>
+                </a:solidFill>
+              </a:defRPr>
+            </a:pPr>
+            <a:r>
+              <a:rPr sz="1500" b="1">
+                <a:solidFill>
+                  <a:srgbClr val="263746"/>
+                </a:solidFill>
+                <a:latin typeface="Microsoft YaHei"/>
+                <a:ea typeface="Microsoft YaHei"/>
+                <a:cs typeface="Microsoft YaHei"/>
+              </a:rPr>
+              <a:t>保留失败、分类根因，并记录人工审核与处置</a:t>
+            </a:r>
+          </a:p>
+        </p:txBody>
+      </p:sp>
+      <p:sp>
+        <p:nvSpPr>
+          <p:cNvPr id="15" name="summary-13-number-3">
+            <a:extLst xmlns:a="http://schemas.openxmlformats.org/drawingml/2006/main">
+              <a:ext uri="{FF2B5EF4-FFF2-40B4-BE49-F238E27FC236}">
+                <a16:creationId xmlns:a16="http://schemas.microsoft.com/office/drawing/2014/main" id="{D335C415-2F7B-46C2-8C5D-CC73818A263A}"/>
+              </a:ext>
+            </a:extLst>
+          </p:cNvPr>
+          <p:cNvSpPr>
+            <a:spLocks xmlns:a="http://schemas.openxmlformats.org/drawingml/2006/main" noGrp="1"/>
+          </p:cNvSpPr>
+          <p:nvPr/>
+        </p:nvSpPr>
+        <p:spPr>
+          <a:xfrm xmlns:a="http://schemas.openxmlformats.org/drawingml/2006/main">
+            <a:off x="9201150" y="1219200"/>
+            <a:ext cx="476250" cy="476250"/>
+          </a:xfrm>
+          <a:prstGeom xmlns:a="http://schemas.openxmlformats.org/drawingml/2006/main" prst="roundRect">
+            <a:avLst>
+              <a:gd name="adj" fmla="val 16000"/>
+            </a:avLst>
+          </a:prstGeom>
+          <a:solidFill xmlns:a="http://schemas.openxmlformats.org/drawingml/2006/main">
+            <a:srgbClr val="A86C12"/>
+          </a:solidFill>
+          <a:ln xmlns:a="http://schemas.openxmlformats.org/drawingml/2006/main" w="0">
+            <a:noFill/>
+            <a:prstDash val="solid"/>
+          </a:ln>
+        </p:spPr>
+        <p:txBody>
+          <a:bodyPr xmlns:a="http://schemas.openxmlformats.org/drawingml/2006/main" lIns="76200" tIns="38100" rIns="76200" bIns="38100" anchor="ctr"/>
+          <a:lstStyle xmlns:a="http://schemas.openxmlformats.org/drawingml/2006/main"/>
+          <a:p xmlns:a="http://schemas.openxmlformats.org/drawingml/2006/main">
+            <a:pPr algn="ctr">
+              <a:lnSpc>
+                <a:spcPct val="112000"/>
+              </a:lnSpc>
+              <a:buNone/>
+              <a:defRPr sz="1500" b="1">
                 <a:solidFill>
                   <a:srgbClr val="FFFFFF"/>
                 </a:solidFill>
               </a:defRPr>
             </a:pPr>
             <a:r>
-              <a:rPr sz="1275" b="1">
+              <a:rPr sz="1500" b="1">
                 <a:solidFill>
                   <a:srgbClr val="FFFFFF"/>
                 </a:solidFill>
@@ -17593,319 +17742,96 @@
       </p:sp>
       <p:sp>
         <p:nvSpPr>
-          <p:cNvPr id="14" name="p16-q-3">
-            <a:extLst xmlns:a="http://schemas.openxmlformats.org/drawingml/2006/main">
-              <a:ext uri="{FF2B5EF4-FFF2-40B4-BE49-F238E27FC236}">
-                <a16:creationId xmlns:a16="http://schemas.microsoft.com/office/drawing/2014/main" id="{ED5B5130-7694-4EA1-97D1-8FC1CCB1D359}"/>
-              </a:ext>
-            </a:extLst>
-          </p:cNvPr>
-          <p:cNvSpPr>
-            <a:spLocks xmlns:a="http://schemas.openxmlformats.org/drawingml/2006/main" noGrp="1"/>
-          </p:cNvSpPr>
-          <p:nvPr/>
-        </p:nvSpPr>
-        <p:spPr>
-          <a:xfrm xmlns:a="http://schemas.openxmlformats.org/drawingml/2006/main">
-            <a:off x="1238250" y="3581400"/>
-            <a:ext cx="5048250" cy="400050"/>
-          </a:xfrm>
-          <a:prstGeom xmlns:a="http://schemas.openxmlformats.org/drawingml/2006/main" prst="rect">
-            <a:avLst/>
-          </a:prstGeom>
-          <a:solidFill xmlns:a="http://schemas.openxmlformats.org/drawingml/2006/main">
-            <a:srgbClr val="F8E9EA"/>
-          </a:solidFill>
-          <a:ln xmlns:a="http://schemas.openxmlformats.org/drawingml/2006/main" w="0">
-            <a:noFill/>
-            <a:prstDash val="solid"/>
-          </a:ln>
-        </p:spPr>
-        <p:txBody>
-          <a:bodyPr xmlns:a="http://schemas.openxmlformats.org/drawingml/2006/main" lIns="76200" tIns="38100" rIns="76200" bIns="38100" anchor="ctr"/>
-          <a:lstStyle xmlns:a="http://schemas.openxmlformats.org/drawingml/2006/main"/>
-          <a:p xmlns:a="http://schemas.openxmlformats.org/drawingml/2006/main">
-            <a:pPr algn="l">
-              <a:buNone/>
-              <a:defRPr sz="1350" b="1">
-                <a:solidFill>
-                  <a:srgbClr val="263746"/>
-                </a:solidFill>
-              </a:defRPr>
-            </a:pPr>
-            <a:r>
-              <a:rPr sz="1350" b="1">
-                <a:solidFill>
-                  <a:srgbClr val="263746"/>
-                </a:solidFill>
-                <a:latin typeface="Microsoft YaHei"/>
-                <a:ea typeface="Microsoft YaHei"/>
-                <a:cs typeface="Microsoft YaHei"/>
-              </a:rPr>
-              <a:t>人工审核与证据充分性可追溯吗？</a:t>
-            </a:r>
-          </a:p>
-        </p:txBody>
-      </p:sp>
-      <p:sp>
-        <p:nvSpPr>
-          <p:cNvPr id="15" name="p16-n-4">
-            <a:extLst xmlns:a="http://schemas.openxmlformats.org/drawingml/2006/main">
-              <a:ext uri="{FF2B5EF4-FFF2-40B4-BE49-F238E27FC236}">
-                <a16:creationId xmlns:a16="http://schemas.microsoft.com/office/drawing/2014/main" id="{EFECC883-CE44-4712-906F-37E5A81CB650}"/>
-              </a:ext>
-            </a:extLst>
-          </p:cNvPr>
-          <p:cNvSpPr>
-            <a:spLocks xmlns:a="http://schemas.openxmlformats.org/drawingml/2006/main" noGrp="1"/>
-          </p:cNvSpPr>
-          <p:nvPr/>
-        </p:nvSpPr>
-        <p:spPr>
-          <a:xfrm xmlns:a="http://schemas.openxmlformats.org/drawingml/2006/main">
-            <a:off x="723900" y="4248150"/>
-            <a:ext cx="419100" cy="400050"/>
+          <p:cNvPr id="16" name="summary-13-heading-3">
+            <a:extLst xmlns:a="http://schemas.openxmlformats.org/drawingml/2006/main">
+              <a:ext uri="{FF2B5EF4-FFF2-40B4-BE49-F238E27FC236}">
+                <a16:creationId xmlns:a16="http://schemas.microsoft.com/office/drawing/2014/main" id="{ED6DEB8D-CCD8-46A4-AA0E-09F5D3E88DFF}"/>
+              </a:ext>
+            </a:extLst>
+          </p:cNvPr>
+          <p:cNvSpPr>
+            <a:spLocks xmlns:a="http://schemas.openxmlformats.org/drawingml/2006/main" noGrp="1"/>
+          </p:cNvSpPr>
+          <p:nvPr/>
+        </p:nvSpPr>
+        <p:spPr>
+          <a:xfrm xmlns:a="http://schemas.openxmlformats.org/drawingml/2006/main">
+            <a:off x="9772650" y="1162050"/>
+            <a:ext cx="2152650" cy="590550"/>
           </a:xfrm>
           <a:prstGeom xmlns:a="http://schemas.openxmlformats.org/drawingml/2006/main" prst="roundRect">
             <a:avLst>
-              <a:gd name="adj" fmla="val 19048"/>
+              <a:gd name="adj" fmla="val 12903"/>
             </a:avLst>
           </a:prstGeom>
           <a:solidFill xmlns:a="http://schemas.openxmlformats.org/drawingml/2006/main">
-            <a:srgbClr val="18354E"/>
-          </a:solidFill>
-          <a:ln xmlns:a="http://schemas.openxmlformats.org/drawingml/2006/main" w="0">
-            <a:noFill/>
-            <a:prstDash val="solid"/>
-          </a:ln>
-        </p:spPr>
-        <p:txBody>
-          <a:bodyPr xmlns:a="http://schemas.openxmlformats.org/drawingml/2006/main" lIns="76200" tIns="38100" rIns="76200" bIns="38100" anchor="ctr"/>
-          <a:lstStyle xmlns:a="http://schemas.openxmlformats.org/drawingml/2006/main"/>
-          <a:p xmlns:a="http://schemas.openxmlformats.org/drawingml/2006/main">
-            <a:pPr algn="ctr">
-              <a:buNone/>
-              <a:defRPr sz="1275" b="1">
-                <a:solidFill>
-                  <a:srgbClr val="FFFFFF"/>
-                </a:solidFill>
-              </a:defRPr>
-            </a:pPr>
-            <a:r>
-              <a:rPr sz="1275" b="1">
-                <a:solidFill>
-                  <a:srgbClr val="FFFFFF"/>
-                </a:solidFill>
-                <a:latin typeface="Arial"/>
-                <a:ea typeface="Arial"/>
-                <a:cs typeface="Arial"/>
-              </a:rPr>
-              <a:t>5</a:t>
-            </a:r>
-          </a:p>
-        </p:txBody>
-      </p:sp>
-      <p:sp>
-        <p:nvSpPr>
-          <p:cNvPr id="16" name="p16-q-4">
-            <a:extLst xmlns:a="http://schemas.openxmlformats.org/drawingml/2006/main">
-              <a:ext uri="{FF2B5EF4-FFF2-40B4-BE49-F238E27FC236}">
-                <a16:creationId xmlns:a16="http://schemas.microsoft.com/office/drawing/2014/main" id="{C52CE204-CE3C-47A4-9A62-2CF9E7C7B416}"/>
-              </a:ext>
-            </a:extLst>
-          </p:cNvPr>
-          <p:cNvSpPr>
-            <a:spLocks xmlns:a="http://schemas.openxmlformats.org/drawingml/2006/main" noGrp="1"/>
-          </p:cNvSpPr>
-          <p:nvPr/>
-        </p:nvSpPr>
-        <p:spPr>
-          <a:xfrm xmlns:a="http://schemas.openxmlformats.org/drawingml/2006/main">
-            <a:off x="1238250" y="4248150"/>
-            <a:ext cx="5048250" cy="400050"/>
-          </a:xfrm>
-          <a:prstGeom xmlns:a="http://schemas.openxmlformats.org/drawingml/2006/main" prst="rect">
-            <a:avLst/>
-          </a:prstGeom>
-          <a:solidFill xmlns:a="http://schemas.openxmlformats.org/drawingml/2006/main">
-            <a:srgbClr val="F3F6F7"/>
-          </a:solidFill>
-          <a:ln xmlns:a="http://schemas.openxmlformats.org/drawingml/2006/main" w="0">
-            <a:noFill/>
-            <a:prstDash val="solid"/>
-          </a:ln>
-        </p:spPr>
-        <p:txBody>
-          <a:bodyPr xmlns:a="http://schemas.openxmlformats.org/drawingml/2006/main" lIns="76200" tIns="38100" rIns="76200" bIns="38100" anchor="ctr"/>
-          <a:lstStyle xmlns:a="http://schemas.openxmlformats.org/drawingml/2006/main"/>
-          <a:p xmlns:a="http://schemas.openxmlformats.org/drawingml/2006/main">
-            <a:pPr algn="l">
-              <a:buNone/>
-              <a:defRPr sz="1350" b="1">
-                <a:solidFill>
-                  <a:srgbClr val="263746"/>
-                </a:solidFill>
-              </a:defRPr>
-            </a:pPr>
-            <a:r>
-              <a:rPr sz="1350" b="1">
-                <a:solidFill>
-                  <a:srgbClr val="263746"/>
-                </a:solidFill>
-                <a:latin typeface="Microsoft YaHei"/>
-                <a:ea typeface="Microsoft YaHei"/>
-                <a:cs typeface="Microsoft YaHei"/>
-              </a:rPr>
-              <a:t>伦理三条中哪一项仍需补全？</a:t>
-            </a:r>
-          </a:p>
-        </p:txBody>
-      </p:sp>
-      <p:sp>
-        <p:nvSpPr>
-          <p:cNvPr id="17" name="p16-next-title">
-            <a:extLst xmlns:a="http://schemas.openxmlformats.org/drawingml/2006/main">
-              <a:ext uri="{FF2B5EF4-FFF2-40B4-BE49-F238E27FC236}">
-                <a16:creationId xmlns:a16="http://schemas.microsoft.com/office/drawing/2014/main" id="{623D9715-1C91-48DD-8204-2DC1EA83348A}"/>
-              </a:ext>
-            </a:extLst>
-          </p:cNvPr>
-          <p:cNvSpPr>
-            <a:spLocks xmlns:a="http://schemas.openxmlformats.org/drawingml/2006/main" noGrp="1"/>
-          </p:cNvSpPr>
-          <p:nvPr/>
-        </p:nvSpPr>
-        <p:spPr>
-          <a:xfrm xmlns:a="http://schemas.openxmlformats.org/drawingml/2006/main">
-            <a:off x="7429500" y="990600"/>
-            <a:ext cx="3905250" cy="457200"/>
-          </a:xfrm>
-          <a:prstGeom xmlns:a="http://schemas.openxmlformats.org/drawingml/2006/main" prst="rect">
-            <a:avLst/>
-          </a:prstGeom>
-          <a:noFill xmlns:a="http://schemas.openxmlformats.org/drawingml/2006/main"/>
-          <a:ln xmlns:a="http://schemas.openxmlformats.org/drawingml/2006/main" w="0">
-            <a:noFill/>
-            <a:prstDash val="solid"/>
-          </a:ln>
-        </p:spPr>
-        <p:txBody>
-          <a:bodyPr xmlns:a="http://schemas.openxmlformats.org/drawingml/2006/main" lIns="76200" tIns="38100" rIns="76200" bIns="38100" anchor="ctr"/>
-          <a:lstStyle xmlns:a="http://schemas.openxmlformats.org/drawingml/2006/main"/>
-          <a:p xmlns:a="http://schemas.openxmlformats.org/drawingml/2006/main">
-            <a:pPr algn="ctr">
-              <a:buNone/>
-              <a:defRPr sz="2025" b="1">
-                <a:solidFill>
-                  <a:srgbClr val="18354E"/>
-                </a:solidFill>
-              </a:defRPr>
-            </a:pPr>
-            <a:r>
-              <a:rPr sz="2025" b="1">
-                <a:solidFill>
-                  <a:srgbClr val="18354E"/>
-                </a:solidFill>
-                <a:latin typeface="Microsoft YaHei"/>
-                <a:ea typeface="Microsoft YaHei"/>
-                <a:cs typeface="Microsoft YaHei"/>
-              </a:rPr>
-              <a:t>提交与回退</a:t>
-            </a:r>
-          </a:p>
-        </p:txBody>
-      </p:sp>
-      <p:sp>
-        <p:nvSpPr>
-          <p:cNvPr id="18" name="p16-line-1">
-            <a:extLst xmlns:a="http://schemas.openxmlformats.org/drawingml/2006/main">
-              <a:ext uri="{FF2B5EF4-FFF2-40B4-BE49-F238E27FC236}">
-                <a16:creationId xmlns:a16="http://schemas.microsoft.com/office/drawing/2014/main" id="{44AC3A78-AD3E-49A2-BD93-2EC1E9A94EB4}"/>
-              </a:ext>
-            </a:extLst>
-          </p:cNvPr>
-          <p:cNvSpPr>
-            <a:spLocks xmlns:a="http://schemas.openxmlformats.org/drawingml/2006/main" noGrp="1"/>
-          </p:cNvSpPr>
-          <p:nvPr/>
-        </p:nvSpPr>
-        <p:spPr>
-          <a:xfrm xmlns:a="http://schemas.openxmlformats.org/drawingml/2006/main" rot="5400000">
-            <a:off x="9001125" y="2619375"/>
-            <a:ext cx="590550" cy="38100"/>
-          </a:xfrm>
-          <a:prstGeom xmlns:a="http://schemas.openxmlformats.org/drawingml/2006/main" prst="rect">
-            <a:avLst/>
-          </a:prstGeom>
-          <a:solidFill xmlns:a="http://schemas.openxmlformats.org/drawingml/2006/main">
-            <a:srgbClr val="D6DDE2"/>
-          </a:solidFill>
-          <a:ln xmlns:a="http://schemas.openxmlformats.org/drawingml/2006/main" w="0">
-            <a:noFill/>
-            <a:prstDash val="solid"/>
-          </a:ln>
-        </p:spPr>
-      </p:sp>
-      <p:sp>
-        <p:nvSpPr>
-          <p:cNvPr id="19" name="p16-line-2">
-            <a:extLst xmlns:a="http://schemas.openxmlformats.org/drawingml/2006/main">
-              <a:ext uri="{FF2B5EF4-FFF2-40B4-BE49-F238E27FC236}">
-                <a16:creationId xmlns:a16="http://schemas.microsoft.com/office/drawing/2014/main" id="{EABD11F4-46D1-49C5-9182-60103924BFFF}"/>
-              </a:ext>
-            </a:extLst>
-          </p:cNvPr>
-          <p:cNvSpPr>
-            <a:spLocks xmlns:a="http://schemas.openxmlformats.org/drawingml/2006/main" noGrp="1"/>
-          </p:cNvSpPr>
-          <p:nvPr/>
-        </p:nvSpPr>
-        <p:spPr>
-          <a:xfrm xmlns:a="http://schemas.openxmlformats.org/drawingml/2006/main" rot="5400000">
-            <a:off x="9001125" y="3990975"/>
-            <a:ext cx="590550" cy="38100"/>
-          </a:xfrm>
-          <a:prstGeom xmlns:a="http://schemas.openxmlformats.org/drawingml/2006/main" prst="rect">
-            <a:avLst/>
-          </a:prstGeom>
-          <a:solidFill xmlns:a="http://schemas.openxmlformats.org/drawingml/2006/main">
-            <a:srgbClr val="D6DDE2"/>
-          </a:solidFill>
-          <a:ln xmlns:a="http://schemas.openxmlformats.org/drawingml/2006/main" w="0">
-            <a:noFill/>
-            <a:prstDash val="solid"/>
-          </a:ln>
-        </p:spPr>
-      </p:sp>
-      <p:sp>
-        <p:nvSpPr>
-          <p:cNvPr id="20" name="p16-now">
-            <a:extLst xmlns:a="http://schemas.openxmlformats.org/drawingml/2006/main">
-              <a:ext uri="{FF2B5EF4-FFF2-40B4-BE49-F238E27FC236}">
-                <a16:creationId xmlns:a16="http://schemas.microsoft.com/office/drawing/2014/main" id="{ADC4F276-98BF-4155-8142-0DBC97F67FB3}"/>
-              </a:ext>
-            </a:extLst>
-          </p:cNvPr>
-          <p:cNvSpPr>
-            <a:spLocks xmlns:a="http://schemas.openxmlformats.org/drawingml/2006/main" noGrp="1"/>
-          </p:cNvSpPr>
-          <p:nvPr/>
-        </p:nvSpPr>
-        <p:spPr>
-          <a:xfrm xmlns:a="http://schemas.openxmlformats.org/drawingml/2006/main">
-            <a:off x="7410450" y="1524000"/>
-            <a:ext cx="3810000" cy="857250"/>
+            <a:srgbClr val="FAF0DD"/>
+          </a:solidFill>
+          <a:ln xmlns:a="http://schemas.openxmlformats.org/drawingml/2006/main" w="0">
+            <a:noFill/>
+            <a:prstDash val="solid"/>
+          </a:ln>
+        </p:spPr>
+        <p:txBody>
+          <a:bodyPr xmlns:a="http://schemas.openxmlformats.org/drawingml/2006/main" lIns="76200" tIns="38100" rIns="76200" bIns="38100" anchor="ctr"/>
+          <a:lstStyle xmlns:a="http://schemas.openxmlformats.org/drawingml/2006/main"/>
+          <a:p xmlns:a="http://schemas.openxmlformats.org/drawingml/2006/main">
+            <a:pPr algn="ctr">
+              <a:lnSpc>
+                <a:spcPct val="112000"/>
+              </a:lnSpc>
+              <a:buNone/>
+              <a:defRPr sz="1725" b="1">
+                <a:solidFill>
+                  <a:srgbClr val="A86C12"/>
+                </a:solidFill>
+              </a:defRPr>
+            </a:pPr>
+            <a:r>
+              <a:rPr sz="1725" b="1">
+                <a:solidFill>
+                  <a:srgbClr val="A86C12"/>
+                </a:solidFill>
+                <a:latin typeface="Microsoft YaHei"/>
+                <a:ea typeface="Microsoft YaHei"/>
+                <a:cs typeface="Microsoft YaHei"/>
+              </a:rPr>
+              <a:t>验证门</a:t>
+            </a:r>
+          </a:p>
+        </p:txBody>
+      </p:sp>
+      <p:sp>
+        <p:nvSpPr>
+          <p:cNvPr id="17" name="summary-13-detail-3">
+            <a:extLst xmlns:a="http://schemas.openxmlformats.org/drawingml/2006/main">
+              <a:ext uri="{FF2B5EF4-FFF2-40B4-BE49-F238E27FC236}">
+                <a16:creationId xmlns:a16="http://schemas.microsoft.com/office/drawing/2014/main" id="{30A08A75-85AB-4DF5-86AA-6F82EC428287}"/>
+              </a:ext>
+            </a:extLst>
+          </p:cNvPr>
+          <p:cNvSpPr>
+            <a:spLocks xmlns:a="http://schemas.openxmlformats.org/drawingml/2006/main" noGrp="1"/>
+          </p:cNvSpPr>
+          <p:nvPr/>
+        </p:nvSpPr>
+        <p:spPr>
+          <a:xfrm xmlns:a="http://schemas.openxmlformats.org/drawingml/2006/main">
+            <a:off x="9201150" y="2095500"/>
+            <a:ext cx="2724150" cy="1676400"/>
           </a:xfrm>
           <a:prstGeom xmlns:a="http://schemas.openxmlformats.org/drawingml/2006/main" prst="roundRect">
             <a:avLst>
-              <a:gd name="adj" fmla="val 8889"/>
+              <a:gd name="adj" fmla="val 4545"/>
             </a:avLst>
           </a:prstGeom>
           <a:solidFill xmlns:a="http://schemas.openxmlformats.org/drawingml/2006/main">
-            <a:srgbClr val="E8F0F6"/>
-          </a:solidFill>
-          <a:ln xmlns:a="http://schemas.openxmlformats.org/drawingml/2006/main" w="0">
-            <a:noFill/>
+            <a:srgbClr val="FFFFFF"/>
+          </a:solidFill>
+          <a:ln xmlns:a="http://schemas.openxmlformats.org/drawingml/2006/main" w="9525">
+            <a:solidFill>
+              <a:srgbClr val="D6DDE2"/>
+            </a:solidFill>
             <a:prstDash val="solid"/>
           </a:ln>
         </p:spPr>
@@ -17915,75 +17841,51 @@
           <a:p xmlns:a="http://schemas.openxmlformats.org/drawingml/2006/main">
             <a:pPr algn="ctr">
               <a:lnSpc>
-                <a:spcPct val="115000"/>
+                <a:spcPct val="116000"/>
               </a:lnSpc>
               <a:buNone/>
               <a:defRPr sz="1500" b="1">
                 <a:solidFill>
-                  <a:srgbClr val="18354E"/>
+                  <a:srgbClr val="263746"/>
                 </a:solidFill>
               </a:defRPr>
             </a:pPr>
             <a:r>
               <a:rPr sz="1500" b="1">
                 <a:solidFill>
-                  <a:srgbClr val="18354E"/>
-                </a:solidFill>
-                <a:latin typeface="Microsoft YaHei"/>
-                <a:ea typeface="Microsoft YaHei"/>
-                <a:cs typeface="Microsoft YaHei"/>
-              </a:rPr>
-              <a:t>本课后｜提交当前项目版本</a:t>
-            </a:r>
-          </a:p>
-          <a:p xmlns:a="http://schemas.openxmlformats.org/drawingml/2006/main">
-            <a:pPr algn="ctr">
-              <a:lnSpc>
-                <a:spcPct val="115000"/>
-              </a:lnSpc>
-              <a:buNone/>
-              <a:defRPr sz="1500" b="1">
-                <a:solidFill>
-                  <a:srgbClr val="18354E"/>
-                </a:solidFill>
-              </a:defRPr>
-            </a:pPr>
-            <a:r>
-              <a:rPr sz="1500" b="1">
-                <a:solidFill>
-                  <a:srgbClr val="18354E"/>
-                </a:solidFill>
-                <a:latin typeface="Microsoft YaHei"/>
-                <a:ea typeface="Microsoft YaHei"/>
-                <a:cs typeface="Microsoft YaHei"/>
-              </a:rPr>
-              <a:t>链接 / tag / 压缩包</a:t>
-            </a:r>
-          </a:p>
-        </p:txBody>
-      </p:sp>
-      <p:sp>
-        <p:nvSpPr>
-          <p:cNvPr id="21" name="p16-week8">
-            <a:extLst xmlns:a="http://schemas.openxmlformats.org/drawingml/2006/main">
-              <a:ext uri="{FF2B5EF4-FFF2-40B4-BE49-F238E27FC236}">
-                <a16:creationId xmlns:a16="http://schemas.microsoft.com/office/drawing/2014/main" id="{6F07E4BD-2272-4F52-8299-020EF30BE1F2}"/>
-              </a:ext>
-            </a:extLst>
-          </p:cNvPr>
-          <p:cNvSpPr>
-            <a:spLocks xmlns:a="http://schemas.openxmlformats.org/drawingml/2006/main" noGrp="1"/>
-          </p:cNvSpPr>
-          <p:nvPr/>
-        </p:nvSpPr>
-        <p:spPr>
-          <a:xfrm xmlns:a="http://schemas.openxmlformats.org/drawingml/2006/main">
-            <a:off x="7410450" y="2990850"/>
-            <a:ext cx="3810000" cy="857250"/>
+                  <a:srgbClr val="263746"/>
+                </a:solidFill>
+                <a:latin typeface="Microsoft YaHei"/>
+                <a:ea typeface="Microsoft YaHei"/>
+                <a:cs typeface="Microsoft YaHei"/>
+              </a:rPr>
+              <a:t>检查证据充分性、有效性威胁、伦理更新与工件完整性</a:t>
+            </a:r>
+          </a:p>
+        </p:txBody>
+      </p:sp>
+      <p:sp>
+        <p:nvSpPr>
+          <p:cNvPr id="18" name="summary-13-boundary">
+            <a:extLst xmlns:a="http://schemas.openxmlformats.org/drawingml/2006/main">
+              <a:ext uri="{FF2B5EF4-FFF2-40B4-BE49-F238E27FC236}">
+                <a16:creationId xmlns:a16="http://schemas.microsoft.com/office/drawing/2014/main" id="{A5BC45F4-C9B4-492A-8AAE-85FDFC35C1D6}"/>
+              </a:ext>
+            </a:extLst>
+          </p:cNvPr>
+          <p:cNvSpPr>
+            <a:spLocks xmlns:a="http://schemas.openxmlformats.org/drawingml/2006/main" noGrp="1"/>
+          </p:cNvSpPr>
+          <p:nvPr/>
+        </p:nvSpPr>
+        <p:spPr>
+          <a:xfrm xmlns:a="http://schemas.openxmlformats.org/drawingml/2006/main">
+            <a:off x="1162050" y="4400550"/>
+            <a:ext cx="9867900" cy="876300"/>
           </a:xfrm>
           <a:prstGeom xmlns:a="http://schemas.openxmlformats.org/drawingml/2006/main" prst="roundRect">
             <a:avLst>
-              <a:gd name="adj" fmla="val 8889"/>
+              <a:gd name="adj" fmla="val 8696"/>
             </a:avLst>
           </a:prstGeom>
           <a:solidFill xmlns:a="http://schemas.openxmlformats.org/drawingml/2006/main">
@@ -18000,17 +17902,17 @@
           <a:p xmlns:a="http://schemas.openxmlformats.org/drawingml/2006/main">
             <a:pPr algn="ctr">
               <a:lnSpc>
-                <a:spcPct val="115000"/>
+                <a:spcPct val="114000"/>
               </a:lnSpc>
               <a:buNone/>
-              <a:defRPr sz="1500" b="1">
+              <a:defRPr sz="1725" b="1">
                 <a:solidFill>
                   <a:srgbClr val="C8161E"/>
                 </a:solidFill>
               </a:defRPr>
             </a:pPr>
             <a:r>
-              <a:rPr sz="1500" b="1">
+              <a:rPr sz="1725" b="1">
                 <a:solidFill>
                   <a:srgbClr val="C8161E"/>
                 </a:solidFill>
@@ -18018,170 +17920,7 @@
                 <a:ea typeface="Microsoft YaHei"/>
                 <a:cs typeface="Microsoft YaHei"/>
               </a:rPr>
-              <a:t>未通过｜修复缺失条件</a:t>
-            </a:r>
-          </a:p>
-          <a:p xmlns:a="http://schemas.openxmlformats.org/drawingml/2006/main">
-            <a:pPr algn="ctr">
-              <a:lnSpc>
-                <a:spcPct val="115000"/>
-              </a:lnSpc>
-              <a:buNone/>
-              <a:defRPr sz="1500" b="1">
-                <a:solidFill>
-                  <a:srgbClr val="C8161E"/>
-                </a:solidFill>
-              </a:defRPr>
-            </a:pPr>
-            <a:r>
-              <a:rPr sz="1500" b="1">
-                <a:solidFill>
-                  <a:srgbClr val="C8161E"/>
-                </a:solidFill>
-                <a:latin typeface="Microsoft YaHei"/>
-                <a:ea typeface="Microsoft YaHei"/>
-                <a:cs typeface="Microsoft YaHei"/>
-              </a:rPr>
-              <a:t>一周内重新检查</a:t>
-            </a:r>
-          </a:p>
-        </p:txBody>
-      </p:sp>
-      <p:sp>
-        <p:nvSpPr>
-          <p:cNvPr id="22" name="p16-week9">
-            <a:extLst xmlns:a="http://schemas.openxmlformats.org/drawingml/2006/main">
-              <a:ext uri="{FF2B5EF4-FFF2-40B4-BE49-F238E27FC236}">
-                <a16:creationId xmlns:a16="http://schemas.microsoft.com/office/drawing/2014/main" id="{6C0C4F82-19ED-4CF1-B1FB-AE85BD280D06}"/>
-              </a:ext>
-            </a:extLst>
-          </p:cNvPr>
-          <p:cNvSpPr>
-            <a:spLocks xmlns:a="http://schemas.openxmlformats.org/drawingml/2006/main" noGrp="1"/>
-          </p:cNvSpPr>
-          <p:nvPr/>
-        </p:nvSpPr>
-        <p:spPr>
-          <a:xfrm xmlns:a="http://schemas.openxmlformats.org/drawingml/2006/main">
-            <a:off x="7410450" y="4457700"/>
-            <a:ext cx="3810000" cy="857250"/>
-          </a:xfrm>
-          <a:prstGeom xmlns:a="http://schemas.openxmlformats.org/drawingml/2006/main" prst="roundRect">
-            <a:avLst>
-              <a:gd name="adj" fmla="val 8889"/>
-            </a:avLst>
-          </a:prstGeom>
-          <a:solidFill xmlns:a="http://schemas.openxmlformats.org/drawingml/2006/main">
-            <a:srgbClr val="E7F2ED"/>
-          </a:solidFill>
-          <a:ln xmlns:a="http://schemas.openxmlformats.org/drawingml/2006/main" w="0">
-            <a:noFill/>
-            <a:prstDash val="solid"/>
-          </a:ln>
-        </p:spPr>
-        <p:txBody>
-          <a:bodyPr xmlns:a="http://schemas.openxmlformats.org/drawingml/2006/main" lIns="76200" tIns="38100" rIns="76200" bIns="38100" anchor="ctr"/>
-          <a:lstStyle xmlns:a="http://schemas.openxmlformats.org/drawingml/2006/main"/>
-          <a:p xmlns:a="http://schemas.openxmlformats.org/drawingml/2006/main">
-            <a:pPr algn="ctr">
-              <a:lnSpc>
-                <a:spcPct val="115000"/>
-              </a:lnSpc>
-              <a:buNone/>
-              <a:defRPr sz="1500" b="1">
-                <a:solidFill>
-                  <a:srgbClr val="28745A"/>
-                </a:solidFill>
-              </a:defRPr>
-            </a:pPr>
-            <a:r>
-              <a:rPr sz="1500" b="1">
-                <a:solidFill>
-                  <a:srgbClr val="28745A"/>
-                </a:solidFill>
-                <a:latin typeface="Microsoft YaHei"/>
-                <a:ea typeface="Microsoft YaHei"/>
-                <a:cs typeface="Microsoft YaHei"/>
-              </a:rPr>
-              <a:t>第 14 课｜论文式写作</a:t>
-            </a:r>
-          </a:p>
-          <a:p xmlns:a="http://schemas.openxmlformats.org/drawingml/2006/main">
-            <a:pPr algn="ctr">
-              <a:lnSpc>
-                <a:spcPct val="115000"/>
-              </a:lnSpc>
-              <a:buNone/>
-              <a:defRPr sz="1500" b="1">
-                <a:solidFill>
-                  <a:srgbClr val="28745A"/>
-                </a:solidFill>
-              </a:defRPr>
-            </a:pPr>
-            <a:r>
-              <a:rPr sz="1500" b="1">
-                <a:solidFill>
-                  <a:srgbClr val="28745A"/>
-                </a:solidFill>
-                <a:latin typeface="Microsoft YaHei"/>
-                <a:ea typeface="Microsoft YaHei"/>
-                <a:cs typeface="Microsoft YaHei"/>
-              </a:rPr>
-              <a:t>结果段 + 讨论段 + AI 披露</a:t>
-            </a:r>
-          </a:p>
-        </p:txBody>
-      </p:sp>
-      <p:sp>
-        <p:nvSpPr>
-          <p:cNvPr id="23" name="p16-bottom">
-            <a:extLst xmlns:a="http://schemas.openxmlformats.org/drawingml/2006/main">
-              <a:ext uri="{FF2B5EF4-FFF2-40B4-BE49-F238E27FC236}">
-                <a16:creationId xmlns:a16="http://schemas.microsoft.com/office/drawing/2014/main" id="{2BBB237B-CE52-4E43-8D61-9243520EF647}"/>
-              </a:ext>
-            </a:extLst>
-          </p:cNvPr>
-          <p:cNvSpPr>
-            <a:spLocks xmlns:a="http://schemas.openxmlformats.org/drawingml/2006/main" noGrp="1"/>
-          </p:cNvSpPr>
-          <p:nvPr/>
-        </p:nvSpPr>
-        <p:spPr>
-          <a:xfrm xmlns:a="http://schemas.openxmlformats.org/drawingml/2006/main">
-            <a:off x="7086600" y="5467350"/>
-            <a:ext cx="4495800" cy="323850"/>
-          </a:xfrm>
-          <a:prstGeom xmlns:a="http://schemas.openxmlformats.org/drawingml/2006/main" prst="rect">
-            <a:avLst/>
-          </a:prstGeom>
-          <a:noFill xmlns:a="http://schemas.openxmlformats.org/drawingml/2006/main"/>
-          <a:ln xmlns:a="http://schemas.openxmlformats.org/drawingml/2006/main" w="0">
-            <a:noFill/>
-            <a:prstDash val="solid"/>
-          </a:ln>
-        </p:spPr>
-        <p:txBody>
-          <a:bodyPr xmlns:a="http://schemas.openxmlformats.org/drawingml/2006/main" lIns="76200" tIns="38100" rIns="76200" bIns="38100" anchor="ctr"/>
-          <a:lstStyle xmlns:a="http://schemas.openxmlformats.org/drawingml/2006/main"/>
-          <a:p xmlns:a="http://schemas.openxmlformats.org/drawingml/2006/main">
-            <a:pPr algn="ctr">
-              <a:buNone/>
-              <a:defRPr sz="1275" b="1">
-                <a:solidFill>
-                  <a:srgbClr val="C8161E"/>
-                </a:solidFill>
-              </a:defRPr>
-            </a:pPr>
-            <a:r>
-              <a:rPr sz="1275" b="1">
-                <a:solidFill>
-                  <a:srgbClr val="C8161E"/>
-                </a:solidFill>
-                <a:latin typeface="Microsoft YaHei"/>
-                <a:ea typeface="Microsoft YaHei"/>
-                <a:cs typeface="Microsoft YaHei"/>
-              </a:rPr>
-              <a:t>失败删除必须恢复｜证据充分性 + 威胁有效性 → 第 14 课直接使用</a:t>
+              <a:t>关键边界：能运行不等于经过评价；删除失败或只报告有利结果会破坏验证门的可审计性。</a:t>
             </a:r>
           </a:p>
         </p:txBody>
@@ -19051,6 +18790,1149 @@
 </p:sld>
 </file>
 
+<file path=ppt/slides/slide20.xml><?xml version="1.0" encoding="utf-8"?>
+<p:sld xmlns:p="http://schemas.openxmlformats.org/presentationml/2006/main">
+  <p:cSld>
+    <p:spTree>
+      <p:nvGrpSpPr>
+        <p:cNvPr id="1" name=""/>
+        <p:cNvGrpSpPr/>
+        <p:nvPr/>
+      </p:nvGrpSpPr>
+      <p:grpSpPr>
+        <a:xfrm xmlns:a="http://schemas.openxmlformats.org/drawingml/2006/main"/>
+      </p:grpSpPr>
+      <p:sp>
+        <p:nvSpPr>
+          <p:cNvPr id="4" name="Text Placeholder 3">
+            <a:extLst xmlns:a="http://schemas.openxmlformats.org/drawingml/2006/main">
+              <a:ext uri="{FF2B5EF4-FFF2-40B4-BE49-F238E27FC236}">
+                <a16:creationId xmlns:a16="http://schemas.microsoft.com/office/drawing/2014/main" id="{4D941B40-7A0A-534E-3563-CA11753C8E3F}"/>
+              </a:ext>
+            </a:extLst>
+          </p:cNvPr>
+          <p:cNvSpPr>
+            <a:spLocks xmlns:a="http://schemas.openxmlformats.org/drawingml/2006/main" noGrp="1"/>
+          </p:cNvSpPr>
+          <p:nvPr>
+            <p:ph type="body" idx="14"/>
+          </p:nvPr>
+        </p:nvSpPr>
+        <p:spPr>
+          <a:xfrm xmlns:a="http://schemas.openxmlformats.org/drawingml/2006/main">
+            <a:off x="1028700" y="28575"/>
+            <a:ext cx="10668000" cy="628650"/>
+          </a:xfrm>
+        </p:spPr>
+        <p:txBody>
+          <a:bodyPr xmlns:a="http://schemas.openxmlformats.org/drawingml/2006/main" lIns="76200" tIns="0" rIns="76200" bIns="0" anchor="ctr"/>
+          <a:lstStyle xmlns:a="http://schemas.openxmlformats.org/drawingml/2006/main"/>
+          <a:p xmlns:a="http://schemas.openxmlformats.org/drawingml/2006/main">
+            <a:pPr algn="l">
+              <a:buNone/>
+            </a:pPr>
+            <a:r>
+              <a:rPr sz="2250" b="1">
+                <a:solidFill>
+                  <a:srgbClr val="FFFFFF"/>
+                </a:solidFill>
+                <a:latin typeface="Microsoft YaHei"/>
+                <a:ea typeface="Microsoft YaHei"/>
+                <a:cs typeface="Microsoft YaHei"/>
+              </a:rPr>
+              <a:t>验证门材料将成为第 14 课结果段与讨论段的直接输入</a:t>
+            </a:r>
+            <a:endParaRPr/>
+          </a:p>
+        </p:txBody>
+      </p:sp>
+      <p:sp>
+        <p:nvSpPr>
+          <p:cNvPr id="5" name="Slide Number Placeholder 4">
+            <a:extLst xmlns:a="http://schemas.openxmlformats.org/drawingml/2006/main">
+              <a:ext uri="{FF2B5EF4-FFF2-40B4-BE49-F238E27FC236}">
+                <a16:creationId xmlns:a16="http://schemas.microsoft.com/office/drawing/2014/main" id="{EBA5909F-738E-F60C-BE8C-B3F1D94548E5}"/>
+              </a:ext>
+            </a:extLst>
+          </p:cNvPr>
+          <p:cNvSpPr>
+            <a:spLocks xmlns:a="http://schemas.openxmlformats.org/drawingml/2006/main" noGrp="1"/>
+          </p:cNvSpPr>
+          <p:nvPr>
+            <p:ph type="sldNum" idx="10"/>
+          </p:nvPr>
+        </p:nvSpPr>
+        <p:spPr/>
+        <p:txBody>
+          <a:bodyPr xmlns:a="http://schemas.openxmlformats.org/drawingml/2006/main"/>
+          <a:lstStyle xmlns:a="http://schemas.openxmlformats.org/drawingml/2006/main"/>
+          <a:p xmlns:a="http://schemas.openxmlformats.org/drawingml/2006/main">
+            <a:fld id="{844E025A-983C-6D44-79C6-4612AACD43FC}" type="slidenum">
+              <a:t>20</a:t>
+            </a:fld>
+            <a:endParaRPr/>
+          </a:p>
+        </p:txBody>
+      </p:sp>
+      <p:sp>
+        <p:nvSpPr>
+          <p:cNvPr id="6" name="p16-exit-title">
+            <a:extLst xmlns:a="http://schemas.openxmlformats.org/drawingml/2006/main">
+              <a:ext uri="{FF2B5EF4-FFF2-40B4-BE49-F238E27FC236}">
+                <a16:creationId xmlns:a16="http://schemas.microsoft.com/office/drawing/2014/main" id="{E1B0F3B8-70CE-4889-AA60-AAD3005E7AB1}"/>
+              </a:ext>
+            </a:extLst>
+          </p:cNvPr>
+          <p:cNvSpPr>
+            <a:spLocks xmlns:a="http://schemas.openxmlformats.org/drawingml/2006/main" noGrp="1"/>
+          </p:cNvSpPr>
+          <p:nvPr/>
+        </p:nvSpPr>
+        <p:spPr>
+          <a:xfrm xmlns:a="http://schemas.openxmlformats.org/drawingml/2006/main">
+            <a:off x="704850" y="990600"/>
+            <a:ext cx="5429250" cy="457200"/>
+          </a:xfrm>
+          <a:prstGeom xmlns:a="http://schemas.openxmlformats.org/drawingml/2006/main" prst="rect">
+            <a:avLst/>
+          </a:prstGeom>
+          <a:noFill xmlns:a="http://schemas.openxmlformats.org/drawingml/2006/main"/>
+          <a:ln xmlns:a="http://schemas.openxmlformats.org/drawingml/2006/main" w="0">
+            <a:noFill/>
+            <a:prstDash val="solid"/>
+          </a:ln>
+        </p:spPr>
+        <p:txBody>
+          <a:bodyPr xmlns:a="http://schemas.openxmlformats.org/drawingml/2006/main" lIns="76200" tIns="38100" rIns="76200" bIns="38100" anchor="ctr"/>
+          <a:lstStyle xmlns:a="http://schemas.openxmlformats.org/drawingml/2006/main"/>
+          <a:p xmlns:a="http://schemas.openxmlformats.org/drawingml/2006/main">
+            <a:pPr algn="ctr">
+              <a:buNone/>
+              <a:defRPr sz="2025" b="1">
+                <a:solidFill>
+                  <a:srgbClr val="C8161E"/>
+                </a:solidFill>
+              </a:defRPr>
+            </a:pPr>
+            <a:r>
+              <a:rPr sz="2025" b="1">
+                <a:solidFill>
+                  <a:srgbClr val="C8161E"/>
+                </a:solidFill>
+                <a:latin typeface="Microsoft YaHei"/>
+                <a:ea typeface="Microsoft YaHei"/>
+                <a:cs typeface="Microsoft YaHei"/>
+              </a:rPr>
+              <a:t>退出卡</a:t>
+            </a:r>
+          </a:p>
+        </p:txBody>
+      </p:sp>
+      <p:sp>
+        <p:nvSpPr>
+          <p:cNvPr id="7" name="p16-n-0">
+            <a:extLst xmlns:a="http://schemas.openxmlformats.org/drawingml/2006/main">
+              <a:ext uri="{FF2B5EF4-FFF2-40B4-BE49-F238E27FC236}">
+                <a16:creationId xmlns:a16="http://schemas.microsoft.com/office/drawing/2014/main" id="{F52F852F-0FE8-480E-B802-08CC6EECB680}"/>
+              </a:ext>
+            </a:extLst>
+          </p:cNvPr>
+          <p:cNvSpPr>
+            <a:spLocks xmlns:a="http://schemas.openxmlformats.org/drawingml/2006/main" noGrp="1"/>
+          </p:cNvSpPr>
+          <p:nvPr/>
+        </p:nvSpPr>
+        <p:spPr>
+          <a:xfrm xmlns:a="http://schemas.openxmlformats.org/drawingml/2006/main">
+            <a:off x="723900" y="1581150"/>
+            <a:ext cx="419100" cy="400050"/>
+          </a:xfrm>
+          <a:prstGeom xmlns:a="http://schemas.openxmlformats.org/drawingml/2006/main" prst="roundRect">
+            <a:avLst>
+              <a:gd name="adj" fmla="val 19048"/>
+            </a:avLst>
+          </a:prstGeom>
+          <a:solidFill xmlns:a="http://schemas.openxmlformats.org/drawingml/2006/main">
+            <a:srgbClr val="18354E"/>
+          </a:solidFill>
+          <a:ln xmlns:a="http://schemas.openxmlformats.org/drawingml/2006/main" w="0">
+            <a:noFill/>
+            <a:prstDash val="solid"/>
+          </a:ln>
+        </p:spPr>
+        <p:txBody>
+          <a:bodyPr xmlns:a="http://schemas.openxmlformats.org/drawingml/2006/main" lIns="76200" tIns="38100" rIns="76200" bIns="38100" anchor="ctr"/>
+          <a:lstStyle xmlns:a="http://schemas.openxmlformats.org/drawingml/2006/main"/>
+          <a:p xmlns:a="http://schemas.openxmlformats.org/drawingml/2006/main">
+            <a:pPr algn="ctr">
+              <a:buNone/>
+              <a:defRPr sz="1275" b="1">
+                <a:solidFill>
+                  <a:srgbClr val="FFFFFF"/>
+                </a:solidFill>
+              </a:defRPr>
+            </a:pPr>
+            <a:r>
+              <a:rPr sz="1275" b="1">
+                <a:solidFill>
+                  <a:srgbClr val="FFFFFF"/>
+                </a:solidFill>
+                <a:latin typeface="Arial"/>
+                <a:ea typeface="Arial"/>
+                <a:cs typeface="Arial"/>
+              </a:rPr>
+              <a:t>1</a:t>
+            </a:r>
+          </a:p>
+        </p:txBody>
+      </p:sp>
+      <p:sp>
+        <p:nvSpPr>
+          <p:cNvPr id="8" name="p16-q-0">
+            <a:extLst xmlns:a="http://schemas.openxmlformats.org/drawingml/2006/main">
+              <a:ext uri="{FF2B5EF4-FFF2-40B4-BE49-F238E27FC236}">
+                <a16:creationId xmlns:a16="http://schemas.microsoft.com/office/drawing/2014/main" id="{03E1C003-D697-4334-BCFC-00FBFD8A0D8C}"/>
+              </a:ext>
+            </a:extLst>
+          </p:cNvPr>
+          <p:cNvSpPr>
+            <a:spLocks xmlns:a="http://schemas.openxmlformats.org/drawingml/2006/main" noGrp="1"/>
+          </p:cNvSpPr>
+          <p:nvPr/>
+        </p:nvSpPr>
+        <p:spPr>
+          <a:xfrm xmlns:a="http://schemas.openxmlformats.org/drawingml/2006/main">
+            <a:off x="1238250" y="1581150"/>
+            <a:ext cx="5048250" cy="400050"/>
+          </a:xfrm>
+          <a:prstGeom xmlns:a="http://schemas.openxmlformats.org/drawingml/2006/main" prst="rect">
+            <a:avLst/>
+          </a:prstGeom>
+          <a:solidFill xmlns:a="http://schemas.openxmlformats.org/drawingml/2006/main">
+            <a:srgbClr val="F3F6F7"/>
+          </a:solidFill>
+          <a:ln xmlns:a="http://schemas.openxmlformats.org/drawingml/2006/main" w="0">
+            <a:noFill/>
+            <a:prstDash val="solid"/>
+          </a:ln>
+        </p:spPr>
+        <p:txBody>
+          <a:bodyPr xmlns:a="http://schemas.openxmlformats.org/drawingml/2006/main" lIns="76200" tIns="38100" rIns="76200" bIns="38100" anchor="ctr"/>
+          <a:lstStyle xmlns:a="http://schemas.openxmlformats.org/drawingml/2006/main"/>
+          <a:p xmlns:a="http://schemas.openxmlformats.org/drawingml/2006/main">
+            <a:pPr algn="l">
+              <a:buNone/>
+              <a:defRPr sz="1350" b="1">
+                <a:solidFill>
+                  <a:srgbClr val="263746"/>
+                </a:solidFill>
+              </a:defRPr>
+            </a:pPr>
+            <a:r>
+              <a:rPr sz="1350" b="1">
+                <a:solidFill>
+                  <a:srgbClr val="263746"/>
+                </a:solidFill>
+                <a:latin typeface="Microsoft YaHei"/>
+                <a:ea typeface="Microsoft YaHei"/>
+                <a:cs typeface="Microsoft YaHei"/>
+              </a:rPr>
+              <a:t>评价有 baseline/对照或等价依据吗？</a:t>
+            </a:r>
+          </a:p>
+        </p:txBody>
+      </p:sp>
+      <p:sp>
+        <p:nvSpPr>
+          <p:cNvPr id="9" name="p16-n-1">
+            <a:extLst xmlns:a="http://schemas.openxmlformats.org/drawingml/2006/main">
+              <a:ext uri="{FF2B5EF4-FFF2-40B4-BE49-F238E27FC236}">
+                <a16:creationId xmlns:a16="http://schemas.microsoft.com/office/drawing/2014/main" id="{D3D5E220-48CA-4F4A-B29D-AE78E188DCB5}"/>
+              </a:ext>
+            </a:extLst>
+          </p:cNvPr>
+          <p:cNvSpPr>
+            <a:spLocks xmlns:a="http://schemas.openxmlformats.org/drawingml/2006/main" noGrp="1"/>
+          </p:cNvSpPr>
+          <p:nvPr/>
+        </p:nvSpPr>
+        <p:spPr>
+          <a:xfrm xmlns:a="http://schemas.openxmlformats.org/drawingml/2006/main">
+            <a:off x="723900" y="2247900"/>
+            <a:ext cx="419100" cy="400050"/>
+          </a:xfrm>
+          <a:prstGeom xmlns:a="http://schemas.openxmlformats.org/drawingml/2006/main" prst="roundRect">
+            <a:avLst>
+              <a:gd name="adj" fmla="val 19048"/>
+            </a:avLst>
+          </a:prstGeom>
+          <a:solidFill xmlns:a="http://schemas.openxmlformats.org/drawingml/2006/main">
+            <a:srgbClr val="18354E"/>
+          </a:solidFill>
+          <a:ln xmlns:a="http://schemas.openxmlformats.org/drawingml/2006/main" w="0">
+            <a:noFill/>
+            <a:prstDash val="solid"/>
+          </a:ln>
+        </p:spPr>
+        <p:txBody>
+          <a:bodyPr xmlns:a="http://schemas.openxmlformats.org/drawingml/2006/main" lIns="76200" tIns="38100" rIns="76200" bIns="38100" anchor="ctr"/>
+          <a:lstStyle xmlns:a="http://schemas.openxmlformats.org/drawingml/2006/main"/>
+          <a:p xmlns:a="http://schemas.openxmlformats.org/drawingml/2006/main">
+            <a:pPr algn="ctr">
+              <a:buNone/>
+              <a:defRPr sz="1275" b="1">
+                <a:solidFill>
+                  <a:srgbClr val="FFFFFF"/>
+                </a:solidFill>
+              </a:defRPr>
+            </a:pPr>
+            <a:r>
+              <a:rPr sz="1275" b="1">
+                <a:solidFill>
+                  <a:srgbClr val="FFFFFF"/>
+                </a:solidFill>
+                <a:latin typeface="Arial"/>
+                <a:ea typeface="Arial"/>
+                <a:cs typeface="Arial"/>
+              </a:rPr>
+              <a:t>2</a:t>
+            </a:r>
+          </a:p>
+        </p:txBody>
+      </p:sp>
+      <p:sp>
+        <p:nvSpPr>
+          <p:cNvPr id="10" name="p16-q-1">
+            <a:extLst xmlns:a="http://schemas.openxmlformats.org/drawingml/2006/main">
+              <a:ext uri="{FF2B5EF4-FFF2-40B4-BE49-F238E27FC236}">
+                <a16:creationId xmlns:a16="http://schemas.microsoft.com/office/drawing/2014/main" id="{DF2C9FE0-2AAB-4D56-B656-4631AB3C0F30}"/>
+              </a:ext>
+            </a:extLst>
+          </p:cNvPr>
+          <p:cNvSpPr>
+            <a:spLocks xmlns:a="http://schemas.openxmlformats.org/drawingml/2006/main" noGrp="1"/>
+          </p:cNvSpPr>
+          <p:nvPr/>
+        </p:nvSpPr>
+        <p:spPr>
+          <a:xfrm xmlns:a="http://schemas.openxmlformats.org/drawingml/2006/main">
+            <a:off x="1238250" y="2247900"/>
+            <a:ext cx="5048250" cy="400050"/>
+          </a:xfrm>
+          <a:prstGeom xmlns:a="http://schemas.openxmlformats.org/drawingml/2006/main" prst="rect">
+            <a:avLst/>
+          </a:prstGeom>
+          <a:solidFill xmlns:a="http://schemas.openxmlformats.org/drawingml/2006/main">
+            <a:srgbClr val="F3F6F7"/>
+          </a:solidFill>
+          <a:ln xmlns:a="http://schemas.openxmlformats.org/drawingml/2006/main" w="0">
+            <a:noFill/>
+            <a:prstDash val="solid"/>
+          </a:ln>
+        </p:spPr>
+        <p:txBody>
+          <a:bodyPr xmlns:a="http://schemas.openxmlformats.org/drawingml/2006/main" lIns="76200" tIns="38100" rIns="76200" bIns="38100" anchor="ctr"/>
+          <a:lstStyle xmlns:a="http://schemas.openxmlformats.org/drawingml/2006/main"/>
+          <a:p xmlns:a="http://schemas.openxmlformats.org/drawingml/2006/main">
+            <a:pPr algn="l">
+              <a:buNone/>
+              <a:defRPr sz="1350" b="1">
+                <a:solidFill>
+                  <a:srgbClr val="263746"/>
+                </a:solidFill>
+              </a:defRPr>
+            </a:pPr>
+            <a:r>
+              <a:rPr sz="1350" b="1">
+                <a:solidFill>
+                  <a:srgbClr val="263746"/>
+                </a:solidFill>
+                <a:latin typeface="Microsoft YaHei"/>
+                <a:ea typeface="Microsoft YaHei"/>
+                <a:cs typeface="Microsoft YaHei"/>
+              </a:rPr>
+              <a:t>结果映射回 H1 还是只报告数字？</a:t>
+            </a:r>
+          </a:p>
+        </p:txBody>
+      </p:sp>
+      <p:sp>
+        <p:nvSpPr>
+          <p:cNvPr id="11" name="p16-n-2">
+            <a:extLst xmlns:a="http://schemas.openxmlformats.org/drawingml/2006/main">
+              <a:ext uri="{FF2B5EF4-FFF2-40B4-BE49-F238E27FC236}">
+                <a16:creationId xmlns:a16="http://schemas.microsoft.com/office/drawing/2014/main" id="{1F933B00-50A2-49A6-9621-B48634E4E405}"/>
+              </a:ext>
+            </a:extLst>
+          </p:cNvPr>
+          <p:cNvSpPr>
+            <a:spLocks xmlns:a="http://schemas.openxmlformats.org/drawingml/2006/main" noGrp="1"/>
+          </p:cNvSpPr>
+          <p:nvPr/>
+        </p:nvSpPr>
+        <p:spPr>
+          <a:xfrm xmlns:a="http://schemas.openxmlformats.org/drawingml/2006/main">
+            <a:off x="723900" y="2914650"/>
+            <a:ext cx="419100" cy="400050"/>
+          </a:xfrm>
+          <a:prstGeom xmlns:a="http://schemas.openxmlformats.org/drawingml/2006/main" prst="roundRect">
+            <a:avLst>
+              <a:gd name="adj" fmla="val 19048"/>
+            </a:avLst>
+          </a:prstGeom>
+          <a:solidFill xmlns:a="http://schemas.openxmlformats.org/drawingml/2006/main">
+            <a:srgbClr val="18354E"/>
+          </a:solidFill>
+          <a:ln xmlns:a="http://schemas.openxmlformats.org/drawingml/2006/main" w="0">
+            <a:noFill/>
+            <a:prstDash val="solid"/>
+          </a:ln>
+        </p:spPr>
+        <p:txBody>
+          <a:bodyPr xmlns:a="http://schemas.openxmlformats.org/drawingml/2006/main" lIns="76200" tIns="38100" rIns="76200" bIns="38100" anchor="ctr"/>
+          <a:lstStyle xmlns:a="http://schemas.openxmlformats.org/drawingml/2006/main"/>
+          <a:p xmlns:a="http://schemas.openxmlformats.org/drawingml/2006/main">
+            <a:pPr algn="ctr">
+              <a:buNone/>
+              <a:defRPr sz="1275" b="1">
+                <a:solidFill>
+                  <a:srgbClr val="FFFFFF"/>
+                </a:solidFill>
+              </a:defRPr>
+            </a:pPr>
+            <a:r>
+              <a:rPr sz="1275" b="1">
+                <a:solidFill>
+                  <a:srgbClr val="FFFFFF"/>
+                </a:solidFill>
+                <a:latin typeface="Arial"/>
+                <a:ea typeface="Arial"/>
+                <a:cs typeface="Arial"/>
+              </a:rPr>
+              <a:t>3</a:t>
+            </a:r>
+          </a:p>
+        </p:txBody>
+      </p:sp>
+      <p:sp>
+        <p:nvSpPr>
+          <p:cNvPr id="12" name="p16-q-2">
+            <a:extLst xmlns:a="http://schemas.openxmlformats.org/drawingml/2006/main">
+              <a:ext uri="{FF2B5EF4-FFF2-40B4-BE49-F238E27FC236}">
+                <a16:creationId xmlns:a16="http://schemas.microsoft.com/office/drawing/2014/main" id="{93694E98-4837-4B7E-9E68-B9CF5D0AE388}"/>
+              </a:ext>
+            </a:extLst>
+          </p:cNvPr>
+          <p:cNvSpPr>
+            <a:spLocks xmlns:a="http://schemas.openxmlformats.org/drawingml/2006/main" noGrp="1"/>
+          </p:cNvSpPr>
+          <p:nvPr/>
+        </p:nvSpPr>
+        <p:spPr>
+          <a:xfrm xmlns:a="http://schemas.openxmlformats.org/drawingml/2006/main">
+            <a:off x="1238250" y="2914650"/>
+            <a:ext cx="5048250" cy="400050"/>
+          </a:xfrm>
+          <a:prstGeom xmlns:a="http://schemas.openxmlformats.org/drawingml/2006/main" prst="rect">
+            <a:avLst/>
+          </a:prstGeom>
+          <a:solidFill xmlns:a="http://schemas.openxmlformats.org/drawingml/2006/main">
+            <a:srgbClr val="F3F6F7"/>
+          </a:solidFill>
+          <a:ln xmlns:a="http://schemas.openxmlformats.org/drawingml/2006/main" w="0">
+            <a:noFill/>
+            <a:prstDash val="solid"/>
+          </a:ln>
+        </p:spPr>
+        <p:txBody>
+          <a:bodyPr xmlns:a="http://schemas.openxmlformats.org/drawingml/2006/main" lIns="76200" tIns="38100" rIns="76200" bIns="38100" anchor="ctr"/>
+          <a:lstStyle xmlns:a="http://schemas.openxmlformats.org/drawingml/2006/main"/>
+          <a:p xmlns:a="http://schemas.openxmlformats.org/drawingml/2006/main">
+            <a:pPr algn="l">
+              <a:buNone/>
+              <a:defRPr sz="1350" b="1">
+                <a:solidFill>
+                  <a:srgbClr val="263746"/>
+                </a:solidFill>
+              </a:defRPr>
+            </a:pPr>
+            <a:r>
+              <a:rPr sz="1350" b="1">
+                <a:solidFill>
+                  <a:srgbClr val="263746"/>
+                </a:solidFill>
+                <a:latin typeface="Microsoft YaHei"/>
+                <a:ea typeface="Microsoft YaHei"/>
+                <a:cs typeface="Microsoft YaHei"/>
+              </a:rPr>
+              <a:t>失败被保留并分类了吗？</a:t>
+            </a:r>
+          </a:p>
+        </p:txBody>
+      </p:sp>
+      <p:sp>
+        <p:nvSpPr>
+          <p:cNvPr id="13" name="p16-n-3">
+            <a:extLst xmlns:a="http://schemas.openxmlformats.org/drawingml/2006/main">
+              <a:ext uri="{FF2B5EF4-FFF2-40B4-BE49-F238E27FC236}">
+                <a16:creationId xmlns:a16="http://schemas.microsoft.com/office/drawing/2014/main" id="{74A6FE59-FCF3-4D28-8A0E-C186DFF46DAC}"/>
+              </a:ext>
+            </a:extLst>
+          </p:cNvPr>
+          <p:cNvSpPr>
+            <a:spLocks xmlns:a="http://schemas.openxmlformats.org/drawingml/2006/main" noGrp="1"/>
+          </p:cNvSpPr>
+          <p:nvPr/>
+        </p:nvSpPr>
+        <p:spPr>
+          <a:xfrm xmlns:a="http://schemas.openxmlformats.org/drawingml/2006/main">
+            <a:off x="723900" y="3581400"/>
+            <a:ext cx="419100" cy="400050"/>
+          </a:xfrm>
+          <a:prstGeom xmlns:a="http://schemas.openxmlformats.org/drawingml/2006/main" prst="roundRect">
+            <a:avLst>
+              <a:gd name="adj" fmla="val 19048"/>
+            </a:avLst>
+          </a:prstGeom>
+          <a:solidFill xmlns:a="http://schemas.openxmlformats.org/drawingml/2006/main">
+            <a:srgbClr val="C8161E"/>
+          </a:solidFill>
+          <a:ln xmlns:a="http://schemas.openxmlformats.org/drawingml/2006/main" w="0">
+            <a:noFill/>
+            <a:prstDash val="solid"/>
+          </a:ln>
+        </p:spPr>
+        <p:txBody>
+          <a:bodyPr xmlns:a="http://schemas.openxmlformats.org/drawingml/2006/main" lIns="76200" tIns="38100" rIns="76200" bIns="38100" anchor="ctr"/>
+          <a:lstStyle xmlns:a="http://schemas.openxmlformats.org/drawingml/2006/main"/>
+          <a:p xmlns:a="http://schemas.openxmlformats.org/drawingml/2006/main">
+            <a:pPr algn="ctr">
+              <a:buNone/>
+              <a:defRPr sz="1275" b="1">
+                <a:solidFill>
+                  <a:srgbClr val="FFFFFF"/>
+                </a:solidFill>
+              </a:defRPr>
+            </a:pPr>
+            <a:r>
+              <a:rPr sz="1275" b="1">
+                <a:solidFill>
+                  <a:srgbClr val="FFFFFF"/>
+                </a:solidFill>
+                <a:latin typeface="Arial"/>
+                <a:ea typeface="Arial"/>
+                <a:cs typeface="Arial"/>
+              </a:rPr>
+              <a:t>4</a:t>
+            </a:r>
+          </a:p>
+        </p:txBody>
+      </p:sp>
+      <p:sp>
+        <p:nvSpPr>
+          <p:cNvPr id="14" name="p16-q-3">
+            <a:extLst xmlns:a="http://schemas.openxmlformats.org/drawingml/2006/main">
+              <a:ext uri="{FF2B5EF4-FFF2-40B4-BE49-F238E27FC236}">
+                <a16:creationId xmlns:a16="http://schemas.microsoft.com/office/drawing/2014/main" id="{ED5B5130-7694-4EA1-97D1-8FC1CCB1D359}"/>
+              </a:ext>
+            </a:extLst>
+          </p:cNvPr>
+          <p:cNvSpPr>
+            <a:spLocks xmlns:a="http://schemas.openxmlformats.org/drawingml/2006/main" noGrp="1"/>
+          </p:cNvSpPr>
+          <p:nvPr/>
+        </p:nvSpPr>
+        <p:spPr>
+          <a:xfrm xmlns:a="http://schemas.openxmlformats.org/drawingml/2006/main">
+            <a:off x="1238250" y="3581400"/>
+            <a:ext cx="5048250" cy="400050"/>
+          </a:xfrm>
+          <a:prstGeom xmlns:a="http://schemas.openxmlformats.org/drawingml/2006/main" prst="rect">
+            <a:avLst/>
+          </a:prstGeom>
+          <a:solidFill xmlns:a="http://schemas.openxmlformats.org/drawingml/2006/main">
+            <a:srgbClr val="F8E9EA"/>
+          </a:solidFill>
+          <a:ln xmlns:a="http://schemas.openxmlformats.org/drawingml/2006/main" w="0">
+            <a:noFill/>
+            <a:prstDash val="solid"/>
+          </a:ln>
+        </p:spPr>
+        <p:txBody>
+          <a:bodyPr xmlns:a="http://schemas.openxmlformats.org/drawingml/2006/main" lIns="76200" tIns="38100" rIns="76200" bIns="38100" anchor="ctr"/>
+          <a:lstStyle xmlns:a="http://schemas.openxmlformats.org/drawingml/2006/main"/>
+          <a:p xmlns:a="http://schemas.openxmlformats.org/drawingml/2006/main">
+            <a:pPr algn="l">
+              <a:buNone/>
+              <a:defRPr sz="1350" b="1">
+                <a:solidFill>
+                  <a:srgbClr val="263746"/>
+                </a:solidFill>
+              </a:defRPr>
+            </a:pPr>
+            <a:r>
+              <a:rPr sz="1350" b="1">
+                <a:solidFill>
+                  <a:srgbClr val="263746"/>
+                </a:solidFill>
+                <a:latin typeface="Microsoft YaHei"/>
+                <a:ea typeface="Microsoft YaHei"/>
+                <a:cs typeface="Microsoft YaHei"/>
+              </a:rPr>
+              <a:t>人工审核与证据充分性可追溯吗？</a:t>
+            </a:r>
+          </a:p>
+        </p:txBody>
+      </p:sp>
+      <p:sp>
+        <p:nvSpPr>
+          <p:cNvPr id="15" name="p16-n-4">
+            <a:extLst xmlns:a="http://schemas.openxmlformats.org/drawingml/2006/main">
+              <a:ext uri="{FF2B5EF4-FFF2-40B4-BE49-F238E27FC236}">
+                <a16:creationId xmlns:a16="http://schemas.microsoft.com/office/drawing/2014/main" id="{EFECC883-CE44-4712-906F-37E5A81CB650}"/>
+              </a:ext>
+            </a:extLst>
+          </p:cNvPr>
+          <p:cNvSpPr>
+            <a:spLocks xmlns:a="http://schemas.openxmlformats.org/drawingml/2006/main" noGrp="1"/>
+          </p:cNvSpPr>
+          <p:nvPr/>
+        </p:nvSpPr>
+        <p:spPr>
+          <a:xfrm xmlns:a="http://schemas.openxmlformats.org/drawingml/2006/main">
+            <a:off x="723900" y="4248150"/>
+            <a:ext cx="419100" cy="400050"/>
+          </a:xfrm>
+          <a:prstGeom xmlns:a="http://schemas.openxmlformats.org/drawingml/2006/main" prst="roundRect">
+            <a:avLst>
+              <a:gd name="adj" fmla="val 19048"/>
+            </a:avLst>
+          </a:prstGeom>
+          <a:solidFill xmlns:a="http://schemas.openxmlformats.org/drawingml/2006/main">
+            <a:srgbClr val="18354E"/>
+          </a:solidFill>
+          <a:ln xmlns:a="http://schemas.openxmlformats.org/drawingml/2006/main" w="0">
+            <a:noFill/>
+            <a:prstDash val="solid"/>
+          </a:ln>
+        </p:spPr>
+        <p:txBody>
+          <a:bodyPr xmlns:a="http://schemas.openxmlformats.org/drawingml/2006/main" lIns="76200" tIns="38100" rIns="76200" bIns="38100" anchor="ctr"/>
+          <a:lstStyle xmlns:a="http://schemas.openxmlformats.org/drawingml/2006/main"/>
+          <a:p xmlns:a="http://schemas.openxmlformats.org/drawingml/2006/main">
+            <a:pPr algn="ctr">
+              <a:buNone/>
+              <a:defRPr sz="1275" b="1">
+                <a:solidFill>
+                  <a:srgbClr val="FFFFFF"/>
+                </a:solidFill>
+              </a:defRPr>
+            </a:pPr>
+            <a:r>
+              <a:rPr sz="1275" b="1">
+                <a:solidFill>
+                  <a:srgbClr val="FFFFFF"/>
+                </a:solidFill>
+                <a:latin typeface="Arial"/>
+                <a:ea typeface="Arial"/>
+                <a:cs typeface="Arial"/>
+              </a:rPr>
+              <a:t>5</a:t>
+            </a:r>
+          </a:p>
+        </p:txBody>
+      </p:sp>
+      <p:sp>
+        <p:nvSpPr>
+          <p:cNvPr id="16" name="p16-q-4">
+            <a:extLst xmlns:a="http://schemas.openxmlformats.org/drawingml/2006/main">
+              <a:ext uri="{FF2B5EF4-FFF2-40B4-BE49-F238E27FC236}">
+                <a16:creationId xmlns:a16="http://schemas.microsoft.com/office/drawing/2014/main" id="{C52CE204-CE3C-47A4-9A62-2CF9E7C7B416}"/>
+              </a:ext>
+            </a:extLst>
+          </p:cNvPr>
+          <p:cNvSpPr>
+            <a:spLocks xmlns:a="http://schemas.openxmlformats.org/drawingml/2006/main" noGrp="1"/>
+          </p:cNvSpPr>
+          <p:nvPr/>
+        </p:nvSpPr>
+        <p:spPr>
+          <a:xfrm xmlns:a="http://schemas.openxmlformats.org/drawingml/2006/main">
+            <a:off x="1238250" y="4248150"/>
+            <a:ext cx="5048250" cy="400050"/>
+          </a:xfrm>
+          <a:prstGeom xmlns:a="http://schemas.openxmlformats.org/drawingml/2006/main" prst="rect">
+            <a:avLst/>
+          </a:prstGeom>
+          <a:solidFill xmlns:a="http://schemas.openxmlformats.org/drawingml/2006/main">
+            <a:srgbClr val="F3F6F7"/>
+          </a:solidFill>
+          <a:ln xmlns:a="http://schemas.openxmlformats.org/drawingml/2006/main" w="0">
+            <a:noFill/>
+            <a:prstDash val="solid"/>
+          </a:ln>
+        </p:spPr>
+        <p:txBody>
+          <a:bodyPr xmlns:a="http://schemas.openxmlformats.org/drawingml/2006/main" lIns="76200" tIns="38100" rIns="76200" bIns="38100" anchor="ctr"/>
+          <a:lstStyle xmlns:a="http://schemas.openxmlformats.org/drawingml/2006/main"/>
+          <a:p xmlns:a="http://schemas.openxmlformats.org/drawingml/2006/main">
+            <a:pPr algn="l">
+              <a:buNone/>
+              <a:defRPr sz="1350" b="1">
+                <a:solidFill>
+                  <a:srgbClr val="263746"/>
+                </a:solidFill>
+              </a:defRPr>
+            </a:pPr>
+            <a:r>
+              <a:rPr sz="1350" b="1">
+                <a:solidFill>
+                  <a:srgbClr val="263746"/>
+                </a:solidFill>
+                <a:latin typeface="Microsoft YaHei"/>
+                <a:ea typeface="Microsoft YaHei"/>
+                <a:cs typeface="Microsoft YaHei"/>
+              </a:rPr>
+              <a:t>伦理三条中哪一项仍需补全？</a:t>
+            </a:r>
+          </a:p>
+        </p:txBody>
+      </p:sp>
+      <p:sp>
+        <p:nvSpPr>
+          <p:cNvPr id="17" name="p16-next-title">
+            <a:extLst xmlns:a="http://schemas.openxmlformats.org/drawingml/2006/main">
+              <a:ext uri="{FF2B5EF4-FFF2-40B4-BE49-F238E27FC236}">
+                <a16:creationId xmlns:a16="http://schemas.microsoft.com/office/drawing/2014/main" id="{623D9715-1C91-48DD-8204-2DC1EA83348A}"/>
+              </a:ext>
+            </a:extLst>
+          </p:cNvPr>
+          <p:cNvSpPr>
+            <a:spLocks xmlns:a="http://schemas.openxmlformats.org/drawingml/2006/main" noGrp="1"/>
+          </p:cNvSpPr>
+          <p:nvPr/>
+        </p:nvSpPr>
+        <p:spPr>
+          <a:xfrm xmlns:a="http://schemas.openxmlformats.org/drawingml/2006/main">
+            <a:off x="7429500" y="990600"/>
+            <a:ext cx="3905250" cy="457200"/>
+          </a:xfrm>
+          <a:prstGeom xmlns:a="http://schemas.openxmlformats.org/drawingml/2006/main" prst="rect">
+            <a:avLst/>
+          </a:prstGeom>
+          <a:noFill xmlns:a="http://schemas.openxmlformats.org/drawingml/2006/main"/>
+          <a:ln xmlns:a="http://schemas.openxmlformats.org/drawingml/2006/main" w="0">
+            <a:noFill/>
+            <a:prstDash val="solid"/>
+          </a:ln>
+        </p:spPr>
+        <p:txBody>
+          <a:bodyPr xmlns:a="http://schemas.openxmlformats.org/drawingml/2006/main" lIns="76200" tIns="38100" rIns="76200" bIns="38100" anchor="ctr"/>
+          <a:lstStyle xmlns:a="http://schemas.openxmlformats.org/drawingml/2006/main"/>
+          <a:p xmlns:a="http://schemas.openxmlformats.org/drawingml/2006/main">
+            <a:pPr algn="ctr">
+              <a:buNone/>
+              <a:defRPr sz="2025" b="1">
+                <a:solidFill>
+                  <a:srgbClr val="18354E"/>
+                </a:solidFill>
+              </a:defRPr>
+            </a:pPr>
+            <a:r>
+              <a:rPr sz="2025" b="1">
+                <a:solidFill>
+                  <a:srgbClr val="18354E"/>
+                </a:solidFill>
+                <a:latin typeface="Microsoft YaHei"/>
+                <a:ea typeface="Microsoft YaHei"/>
+                <a:cs typeface="Microsoft YaHei"/>
+              </a:rPr>
+              <a:t>提交与回退</a:t>
+            </a:r>
+          </a:p>
+        </p:txBody>
+      </p:sp>
+      <p:sp>
+        <p:nvSpPr>
+          <p:cNvPr id="18" name="p16-line-1">
+            <a:extLst xmlns:a="http://schemas.openxmlformats.org/drawingml/2006/main">
+              <a:ext uri="{FF2B5EF4-FFF2-40B4-BE49-F238E27FC236}">
+                <a16:creationId xmlns:a16="http://schemas.microsoft.com/office/drawing/2014/main" id="{44AC3A78-AD3E-49A2-BD93-2EC1E9A94EB4}"/>
+              </a:ext>
+            </a:extLst>
+          </p:cNvPr>
+          <p:cNvSpPr>
+            <a:spLocks xmlns:a="http://schemas.openxmlformats.org/drawingml/2006/main" noGrp="1"/>
+          </p:cNvSpPr>
+          <p:nvPr/>
+        </p:nvSpPr>
+        <p:spPr>
+          <a:xfrm xmlns:a="http://schemas.openxmlformats.org/drawingml/2006/main" rot="5400000">
+            <a:off x="9001125" y="2619375"/>
+            <a:ext cx="590550" cy="38100"/>
+          </a:xfrm>
+          <a:prstGeom xmlns:a="http://schemas.openxmlformats.org/drawingml/2006/main" prst="rect">
+            <a:avLst/>
+          </a:prstGeom>
+          <a:solidFill xmlns:a="http://schemas.openxmlformats.org/drawingml/2006/main">
+            <a:srgbClr val="D6DDE2"/>
+          </a:solidFill>
+          <a:ln xmlns:a="http://schemas.openxmlformats.org/drawingml/2006/main" w="0">
+            <a:noFill/>
+            <a:prstDash val="solid"/>
+          </a:ln>
+        </p:spPr>
+      </p:sp>
+      <p:sp>
+        <p:nvSpPr>
+          <p:cNvPr id="19" name="p16-line-2">
+            <a:extLst xmlns:a="http://schemas.openxmlformats.org/drawingml/2006/main">
+              <a:ext uri="{FF2B5EF4-FFF2-40B4-BE49-F238E27FC236}">
+                <a16:creationId xmlns:a16="http://schemas.microsoft.com/office/drawing/2014/main" id="{EABD11F4-46D1-49C5-9182-60103924BFFF}"/>
+              </a:ext>
+            </a:extLst>
+          </p:cNvPr>
+          <p:cNvSpPr>
+            <a:spLocks xmlns:a="http://schemas.openxmlformats.org/drawingml/2006/main" noGrp="1"/>
+          </p:cNvSpPr>
+          <p:nvPr/>
+        </p:nvSpPr>
+        <p:spPr>
+          <a:xfrm xmlns:a="http://schemas.openxmlformats.org/drawingml/2006/main" rot="5400000">
+            <a:off x="9001125" y="3990975"/>
+            <a:ext cx="590550" cy="38100"/>
+          </a:xfrm>
+          <a:prstGeom xmlns:a="http://schemas.openxmlformats.org/drawingml/2006/main" prst="rect">
+            <a:avLst/>
+          </a:prstGeom>
+          <a:solidFill xmlns:a="http://schemas.openxmlformats.org/drawingml/2006/main">
+            <a:srgbClr val="D6DDE2"/>
+          </a:solidFill>
+          <a:ln xmlns:a="http://schemas.openxmlformats.org/drawingml/2006/main" w="0">
+            <a:noFill/>
+            <a:prstDash val="solid"/>
+          </a:ln>
+        </p:spPr>
+      </p:sp>
+      <p:sp>
+        <p:nvSpPr>
+          <p:cNvPr id="20" name="p16-now">
+            <a:extLst xmlns:a="http://schemas.openxmlformats.org/drawingml/2006/main">
+              <a:ext uri="{FF2B5EF4-FFF2-40B4-BE49-F238E27FC236}">
+                <a16:creationId xmlns:a16="http://schemas.microsoft.com/office/drawing/2014/main" id="{ADC4F276-98BF-4155-8142-0DBC97F67FB3}"/>
+              </a:ext>
+            </a:extLst>
+          </p:cNvPr>
+          <p:cNvSpPr>
+            <a:spLocks xmlns:a="http://schemas.openxmlformats.org/drawingml/2006/main" noGrp="1"/>
+          </p:cNvSpPr>
+          <p:nvPr/>
+        </p:nvSpPr>
+        <p:spPr>
+          <a:xfrm xmlns:a="http://schemas.openxmlformats.org/drawingml/2006/main">
+            <a:off x="7410450" y="1524000"/>
+            <a:ext cx="3810000" cy="857250"/>
+          </a:xfrm>
+          <a:prstGeom xmlns:a="http://schemas.openxmlformats.org/drawingml/2006/main" prst="roundRect">
+            <a:avLst>
+              <a:gd name="adj" fmla="val 8889"/>
+            </a:avLst>
+          </a:prstGeom>
+          <a:solidFill xmlns:a="http://schemas.openxmlformats.org/drawingml/2006/main">
+            <a:srgbClr val="E8F0F6"/>
+          </a:solidFill>
+          <a:ln xmlns:a="http://schemas.openxmlformats.org/drawingml/2006/main" w="0">
+            <a:noFill/>
+            <a:prstDash val="solid"/>
+          </a:ln>
+        </p:spPr>
+        <p:txBody>
+          <a:bodyPr xmlns:a="http://schemas.openxmlformats.org/drawingml/2006/main" lIns="76200" tIns="38100" rIns="76200" bIns="38100" anchor="ctr"/>
+          <a:lstStyle xmlns:a="http://schemas.openxmlformats.org/drawingml/2006/main"/>
+          <a:p xmlns:a="http://schemas.openxmlformats.org/drawingml/2006/main">
+            <a:pPr algn="ctr">
+              <a:lnSpc>
+                <a:spcPct val="115000"/>
+              </a:lnSpc>
+              <a:buNone/>
+              <a:defRPr sz="1500" b="1">
+                <a:solidFill>
+                  <a:srgbClr val="18354E"/>
+                </a:solidFill>
+              </a:defRPr>
+            </a:pPr>
+            <a:r>
+              <a:rPr sz="1500" b="1">
+                <a:solidFill>
+                  <a:srgbClr val="18354E"/>
+                </a:solidFill>
+                <a:latin typeface="Microsoft YaHei"/>
+                <a:ea typeface="Microsoft YaHei"/>
+                <a:cs typeface="Microsoft YaHei"/>
+              </a:rPr>
+              <a:t>本课后｜提交当前项目版本</a:t>
+            </a:r>
+          </a:p>
+          <a:p xmlns:a="http://schemas.openxmlformats.org/drawingml/2006/main">
+            <a:pPr algn="ctr">
+              <a:lnSpc>
+                <a:spcPct val="115000"/>
+              </a:lnSpc>
+              <a:buNone/>
+              <a:defRPr sz="1500" b="1">
+                <a:solidFill>
+                  <a:srgbClr val="18354E"/>
+                </a:solidFill>
+              </a:defRPr>
+            </a:pPr>
+            <a:r>
+              <a:rPr sz="1500" b="1">
+                <a:solidFill>
+                  <a:srgbClr val="18354E"/>
+                </a:solidFill>
+                <a:latin typeface="Microsoft YaHei"/>
+                <a:ea typeface="Microsoft YaHei"/>
+                <a:cs typeface="Microsoft YaHei"/>
+              </a:rPr>
+              <a:t>链接 / tag / 压缩包</a:t>
+            </a:r>
+          </a:p>
+        </p:txBody>
+      </p:sp>
+      <p:sp>
+        <p:nvSpPr>
+          <p:cNvPr id="21" name="p16-week8">
+            <a:extLst xmlns:a="http://schemas.openxmlformats.org/drawingml/2006/main">
+              <a:ext uri="{FF2B5EF4-FFF2-40B4-BE49-F238E27FC236}">
+                <a16:creationId xmlns:a16="http://schemas.microsoft.com/office/drawing/2014/main" id="{6F07E4BD-2272-4F52-8299-020EF30BE1F2}"/>
+              </a:ext>
+            </a:extLst>
+          </p:cNvPr>
+          <p:cNvSpPr>
+            <a:spLocks xmlns:a="http://schemas.openxmlformats.org/drawingml/2006/main" noGrp="1"/>
+          </p:cNvSpPr>
+          <p:nvPr/>
+        </p:nvSpPr>
+        <p:spPr>
+          <a:xfrm xmlns:a="http://schemas.openxmlformats.org/drawingml/2006/main">
+            <a:off x="7410450" y="2990850"/>
+            <a:ext cx="3810000" cy="857250"/>
+          </a:xfrm>
+          <a:prstGeom xmlns:a="http://schemas.openxmlformats.org/drawingml/2006/main" prst="roundRect">
+            <a:avLst>
+              <a:gd name="adj" fmla="val 8889"/>
+            </a:avLst>
+          </a:prstGeom>
+          <a:solidFill xmlns:a="http://schemas.openxmlformats.org/drawingml/2006/main">
+            <a:srgbClr val="F8E9EA"/>
+          </a:solidFill>
+          <a:ln xmlns:a="http://schemas.openxmlformats.org/drawingml/2006/main" w="0">
+            <a:noFill/>
+            <a:prstDash val="solid"/>
+          </a:ln>
+        </p:spPr>
+        <p:txBody>
+          <a:bodyPr xmlns:a="http://schemas.openxmlformats.org/drawingml/2006/main" lIns="76200" tIns="38100" rIns="76200" bIns="38100" anchor="ctr"/>
+          <a:lstStyle xmlns:a="http://schemas.openxmlformats.org/drawingml/2006/main"/>
+          <a:p xmlns:a="http://schemas.openxmlformats.org/drawingml/2006/main">
+            <a:pPr algn="ctr">
+              <a:lnSpc>
+                <a:spcPct val="115000"/>
+              </a:lnSpc>
+              <a:buNone/>
+              <a:defRPr sz="1500" b="1">
+                <a:solidFill>
+                  <a:srgbClr val="C8161E"/>
+                </a:solidFill>
+              </a:defRPr>
+            </a:pPr>
+            <a:r>
+              <a:rPr sz="1500" b="1">
+                <a:solidFill>
+                  <a:srgbClr val="C8161E"/>
+                </a:solidFill>
+                <a:latin typeface="Microsoft YaHei"/>
+                <a:ea typeface="Microsoft YaHei"/>
+                <a:cs typeface="Microsoft YaHei"/>
+              </a:rPr>
+              <a:t>未通过｜修复缺失条件</a:t>
+            </a:r>
+          </a:p>
+          <a:p xmlns:a="http://schemas.openxmlformats.org/drawingml/2006/main">
+            <a:pPr algn="ctr">
+              <a:lnSpc>
+                <a:spcPct val="115000"/>
+              </a:lnSpc>
+              <a:buNone/>
+              <a:defRPr sz="1500" b="1">
+                <a:solidFill>
+                  <a:srgbClr val="C8161E"/>
+                </a:solidFill>
+              </a:defRPr>
+            </a:pPr>
+            <a:r>
+              <a:rPr sz="1500" b="1">
+                <a:solidFill>
+                  <a:srgbClr val="C8161E"/>
+                </a:solidFill>
+                <a:latin typeface="Microsoft YaHei"/>
+                <a:ea typeface="Microsoft YaHei"/>
+                <a:cs typeface="Microsoft YaHei"/>
+              </a:rPr>
+              <a:t>一周内重新检查</a:t>
+            </a:r>
+          </a:p>
+        </p:txBody>
+      </p:sp>
+      <p:sp>
+        <p:nvSpPr>
+          <p:cNvPr id="22" name="p16-week9">
+            <a:extLst xmlns:a="http://schemas.openxmlformats.org/drawingml/2006/main">
+              <a:ext uri="{FF2B5EF4-FFF2-40B4-BE49-F238E27FC236}">
+                <a16:creationId xmlns:a16="http://schemas.microsoft.com/office/drawing/2014/main" id="{6C0C4F82-19ED-4CF1-B1FB-AE85BD280D06}"/>
+              </a:ext>
+            </a:extLst>
+          </p:cNvPr>
+          <p:cNvSpPr>
+            <a:spLocks xmlns:a="http://schemas.openxmlformats.org/drawingml/2006/main" noGrp="1"/>
+          </p:cNvSpPr>
+          <p:nvPr/>
+        </p:nvSpPr>
+        <p:spPr>
+          <a:xfrm xmlns:a="http://schemas.openxmlformats.org/drawingml/2006/main">
+            <a:off x="7410450" y="4457700"/>
+            <a:ext cx="3810000" cy="857250"/>
+          </a:xfrm>
+          <a:prstGeom xmlns:a="http://schemas.openxmlformats.org/drawingml/2006/main" prst="roundRect">
+            <a:avLst>
+              <a:gd name="adj" fmla="val 8889"/>
+            </a:avLst>
+          </a:prstGeom>
+          <a:solidFill xmlns:a="http://schemas.openxmlformats.org/drawingml/2006/main">
+            <a:srgbClr val="E7F2ED"/>
+          </a:solidFill>
+          <a:ln xmlns:a="http://schemas.openxmlformats.org/drawingml/2006/main" w="0">
+            <a:noFill/>
+            <a:prstDash val="solid"/>
+          </a:ln>
+        </p:spPr>
+        <p:txBody>
+          <a:bodyPr xmlns:a="http://schemas.openxmlformats.org/drawingml/2006/main" lIns="76200" tIns="38100" rIns="76200" bIns="38100" anchor="ctr"/>
+          <a:lstStyle xmlns:a="http://schemas.openxmlformats.org/drawingml/2006/main"/>
+          <a:p xmlns:a="http://schemas.openxmlformats.org/drawingml/2006/main">
+            <a:pPr algn="ctr">
+              <a:lnSpc>
+                <a:spcPct val="115000"/>
+              </a:lnSpc>
+              <a:buNone/>
+              <a:defRPr sz="1500" b="1">
+                <a:solidFill>
+                  <a:srgbClr val="28745A"/>
+                </a:solidFill>
+              </a:defRPr>
+            </a:pPr>
+            <a:r>
+              <a:rPr sz="1500" b="1">
+                <a:solidFill>
+                  <a:srgbClr val="28745A"/>
+                </a:solidFill>
+                <a:latin typeface="Microsoft YaHei"/>
+                <a:ea typeface="Microsoft YaHei"/>
+                <a:cs typeface="Microsoft YaHei"/>
+              </a:rPr>
+              <a:t>第 14 课｜论文式写作</a:t>
+            </a:r>
+          </a:p>
+          <a:p xmlns:a="http://schemas.openxmlformats.org/drawingml/2006/main">
+            <a:pPr algn="ctr">
+              <a:lnSpc>
+                <a:spcPct val="115000"/>
+              </a:lnSpc>
+              <a:buNone/>
+              <a:defRPr sz="1500" b="1">
+                <a:solidFill>
+                  <a:srgbClr val="28745A"/>
+                </a:solidFill>
+              </a:defRPr>
+            </a:pPr>
+            <a:r>
+              <a:rPr sz="1500" b="1">
+                <a:solidFill>
+                  <a:srgbClr val="28745A"/>
+                </a:solidFill>
+                <a:latin typeface="Microsoft YaHei"/>
+                <a:ea typeface="Microsoft YaHei"/>
+                <a:cs typeface="Microsoft YaHei"/>
+              </a:rPr>
+              <a:t>结果段 + 讨论段 + AI 披露</a:t>
+            </a:r>
+          </a:p>
+        </p:txBody>
+      </p:sp>
+      <p:sp>
+        <p:nvSpPr>
+          <p:cNvPr id="23" name="p16-bottom">
+            <a:extLst xmlns:a="http://schemas.openxmlformats.org/drawingml/2006/main">
+              <a:ext uri="{FF2B5EF4-FFF2-40B4-BE49-F238E27FC236}">
+                <a16:creationId xmlns:a16="http://schemas.microsoft.com/office/drawing/2014/main" id="{2BBB237B-CE52-4E43-8D61-9243520EF647}"/>
+              </a:ext>
+            </a:extLst>
+          </p:cNvPr>
+          <p:cNvSpPr>
+            <a:spLocks xmlns:a="http://schemas.openxmlformats.org/drawingml/2006/main" noGrp="1"/>
+          </p:cNvSpPr>
+          <p:nvPr/>
+        </p:nvSpPr>
+        <p:spPr>
+          <a:xfrm xmlns:a="http://schemas.openxmlformats.org/drawingml/2006/main">
+            <a:off x="7086600" y="5467350"/>
+            <a:ext cx="4495800" cy="323850"/>
+          </a:xfrm>
+          <a:prstGeom xmlns:a="http://schemas.openxmlformats.org/drawingml/2006/main" prst="rect">
+            <a:avLst/>
+          </a:prstGeom>
+          <a:noFill xmlns:a="http://schemas.openxmlformats.org/drawingml/2006/main"/>
+          <a:ln xmlns:a="http://schemas.openxmlformats.org/drawingml/2006/main" w="0">
+            <a:noFill/>
+            <a:prstDash val="solid"/>
+          </a:ln>
+        </p:spPr>
+        <p:txBody>
+          <a:bodyPr xmlns:a="http://schemas.openxmlformats.org/drawingml/2006/main" lIns="76200" tIns="38100" rIns="76200" bIns="38100" anchor="ctr"/>
+          <a:lstStyle xmlns:a="http://schemas.openxmlformats.org/drawingml/2006/main"/>
+          <a:p xmlns:a="http://schemas.openxmlformats.org/drawingml/2006/main">
+            <a:pPr algn="ctr">
+              <a:buNone/>
+              <a:defRPr sz="1275" b="1">
+                <a:solidFill>
+                  <a:srgbClr val="C8161E"/>
+                </a:solidFill>
+              </a:defRPr>
+            </a:pPr>
+            <a:r>
+              <a:rPr sz="1275" b="1">
+                <a:solidFill>
+                  <a:srgbClr val="C8161E"/>
+                </a:solidFill>
+                <a:latin typeface="Microsoft YaHei"/>
+                <a:ea typeface="Microsoft YaHei"/>
+                <a:cs typeface="Microsoft YaHei"/>
+              </a:rPr>
+              <a:t>失败删除必须恢复｜证据充分性 + 威胁有效性 → 第 14 课直接使用</a:t>
+            </a:r>
+          </a:p>
+        </p:txBody>
+      </p:sp>
+    </p:spTree>
+    <p:extLst>
+      <p:ext uri="{BB962C8B-B14F-4D97-AF65-F5344CB8AC3E}">
+        <p14:creationId xmlns:p14="http://schemas.microsoft.com/office/powerpoint/2010/main" val="1443728403"/>
+      </p:ext>
+    </p:extLst>
+  </p:cSld>
+</p:sld>
+</file>
+
 <file path=ppt/slides/slide3.xml><?xml version="1.0" encoding="utf-8"?>
 <p:sld xmlns:p="http://schemas.openxmlformats.org/presentationml/2006/main">
   <p:cSld>
@@ -21370,6 +22252,7 @@
           <a:lstStyle xmlns:a="http://schemas.openxmlformats.org/drawingml/2006/main"/>
           <a:p xmlns:a="http://schemas.openxmlformats.org/drawingml/2006/main">
             <a:pPr algn="ctr">
+              <a:buNone/>
               <a:defRPr sz="1800" b="1">
                 <a:solidFill>
                   <a:srgbClr val="C8161E"/>
@@ -23425,6 +24308,7 @@
           <a:lstStyle xmlns:a="http://schemas.openxmlformats.org/drawingml/2006/main"/>
           <a:p xmlns:a="http://schemas.openxmlformats.org/drawingml/2006/main">
             <a:pPr algn="ctr">
+              <a:buNone/>
               <a:defRPr sz="1800" b="1">
                 <a:solidFill>
                   <a:srgbClr val="C8161E"/>
@@ -25713,6 +26597,7 @@
           <a:lstStyle xmlns:a="http://schemas.openxmlformats.org/drawingml/2006/main"/>
           <a:p xmlns:a="http://schemas.openxmlformats.org/drawingml/2006/main">
             <a:pPr algn="ctr">
+              <a:buNone/>
               <a:defRPr sz="1800" b="1">
                 <a:solidFill>
                   <a:srgbClr val="C8161E"/>
